--- a/SIH_Problem_26178_Project_Review_I.pptx
+++ b/SIH_Problem_26178_Project_Review_I.pptx
@@ -5,30 +5,30 @@
     <p:sldMasterId id="2147483648" r:id="rId1"/>
   </p:sldMasterIdLst>
   <p:sldIdLst>
-    <p:sldId id="256" r:id="rId2"/>
-    <p:sldId id="257" r:id="rId3"/>
-    <p:sldId id="258" r:id="rId4"/>
-    <p:sldId id="259" r:id="rId5"/>
-    <p:sldId id="260" r:id="rId6"/>
-    <p:sldId id="261" r:id="rId7"/>
-    <p:sldId id="262" r:id="rId8"/>
-    <p:sldId id="263" r:id="rId9"/>
-    <p:sldId id="264" r:id="rId10"/>
-    <p:sldId id="265" r:id="rId11"/>
-    <p:sldId id="266" r:id="rId12"/>
-    <p:sldId id="267" r:id="rId13"/>
-    <p:sldId id="268" r:id="rId14"/>
-    <p:sldId id="269" r:id="rId15"/>
-    <p:sldId id="270" r:id="rId16"/>
-    <p:sldId id="271" r:id="rId17"/>
-    <p:sldId id="272" r:id="rId18"/>
-    <p:sldId id="273" r:id="rId19"/>
-    <p:sldId id="274" r:id="rId20"/>
-    <p:sldId id="275" r:id="rId21"/>
-    <p:sldId id="276" r:id="rId22"/>
-    <p:sldId id="277" r:id="rId23"/>
+    <p:sldId id="256" r:id="rId7"/>
+    <p:sldId id="257" r:id="rId8"/>
+    <p:sldId id="258" r:id="rId9"/>
+    <p:sldId id="259" r:id="rId10"/>
+    <p:sldId id="260" r:id="rId11"/>
+    <p:sldId id="261" r:id="rId12"/>
+    <p:sldId id="262" r:id="rId13"/>
+    <p:sldId id="263" r:id="rId14"/>
+    <p:sldId id="264" r:id="rId15"/>
+    <p:sldId id="265" r:id="rId16"/>
+    <p:sldId id="266" r:id="rId17"/>
+    <p:sldId id="267" r:id="rId18"/>
+    <p:sldId id="268" r:id="rId19"/>
+    <p:sldId id="269" r:id="rId20"/>
+    <p:sldId id="270" r:id="rId21"/>
+    <p:sldId id="271" r:id="rId22"/>
+    <p:sldId id="272" r:id="rId23"/>
+    <p:sldId id="273" r:id="rId24"/>
+    <p:sldId id="274" r:id="rId25"/>
+    <p:sldId id="275" r:id="rId26"/>
+    <p:sldId id="276" r:id="rId27"/>
+    <p:sldId id="277" r:id="rId28"/>
   </p:sldIdLst>
-  <p:sldSz cx="12192000" cy="6858000"/>
+  <p:sldSz cx="12191695" cy="6858000" type="screen4x3"/>
   <p:notesSz cx="6858000" cy="9144000"/>
   <p:defaultTextStyle>
     <a:defPPr>
@@ -125,22 +125,6 @@
       </a:defRPr>
     </a:lvl9pPr>
   </p:defaultTextStyle>
-  <p:extLst>
-    <p:ext uri="{EFAFB233-063F-42B5-8137-9DF3F51BA10A}">
-      <p15:sldGuideLst xmlns:p15="http://schemas.microsoft.com/office/powerpoint/2012/main">
-        <p15:guide id="1" orient="horz" pos="2160">
-          <p15:clr>
-            <a:srgbClr val="A4A3A4"/>
-          </p15:clr>
-        </p15:guide>
-        <p15:guide id="2" pos="2880">
-          <p15:clr>
-            <a:srgbClr val="A4A3A4"/>
-          </p15:clr>
-        </p15:guide>
-      </p15:sldGuideLst>
-    </p:ext>
-  </p:extLst>
 </p:presentation>
 </file>
 
@@ -182,9 +166,10 @@
           <a:lstStyle/>
           <a:p>
             <a:r>
-              <a:rPr lang="en-US"/>
+              <a:rPr lang="en-US" smtClean="0"/>
               <a:t>Click to edit Master title style</a:t>
             </a:r>
+            <a:endParaRPr lang="en-US"/>
           </a:p>
         </p:txBody>
       </p:sp>
@@ -300,9 +285,10 @@
           </a:lstStyle>
           <a:p>
             <a:r>
-              <a:rPr lang="en-US"/>
+              <a:rPr lang="en-US" smtClean="0"/>
               <a:t>Click to edit Master subtitle style</a:t>
             </a:r>
+            <a:endParaRPr lang="en-US"/>
           </a:p>
         </p:txBody>
       </p:sp>
@@ -323,7 +309,7 @@
           <a:p>
             <a:fld id="{5BCAD085-E8A6-8845-BD4E-CB4CCA059FC4}" type="datetimeFigureOut">
               <a:rPr lang="en-US" smtClean="0"/>
-              <a:t>8/29/2026</a:t>
+              <a:t>1/27/13</a:t>
             </a:fld>
             <a:endParaRPr lang="en-US"/>
           </a:p>
@@ -417,9 +403,10 @@
           <a:lstStyle/>
           <a:p>
             <a:r>
-              <a:rPr lang="en-US"/>
+              <a:rPr lang="en-US" smtClean="0"/>
               <a:t>Click to edit Master title style</a:t>
             </a:r>
+            <a:endParaRPr lang="en-US"/>
           </a:p>
         </p:txBody>
       </p:sp>
@@ -440,37 +427,38 @@
           <a:p>
             <a:pPr lvl="0"/>
             <a:r>
-              <a:rPr lang="en-US"/>
+              <a:rPr lang="en-US" smtClean="0"/>
               <a:t>Click to edit Master text styles</a:t>
             </a:r>
           </a:p>
           <a:p>
             <a:pPr lvl="1"/>
             <a:r>
-              <a:rPr lang="en-US"/>
+              <a:rPr lang="en-US" smtClean="0"/>
               <a:t>Second level</a:t>
             </a:r>
           </a:p>
           <a:p>
             <a:pPr lvl="2"/>
             <a:r>
-              <a:rPr lang="en-US"/>
+              <a:rPr lang="en-US" smtClean="0"/>
               <a:t>Third level</a:t>
             </a:r>
           </a:p>
           <a:p>
             <a:pPr lvl="3"/>
             <a:r>
-              <a:rPr lang="en-US"/>
+              <a:rPr lang="en-US" smtClean="0"/>
               <a:t>Fourth level</a:t>
             </a:r>
           </a:p>
           <a:p>
             <a:pPr lvl="4"/>
             <a:r>
-              <a:rPr lang="en-US"/>
+              <a:rPr lang="en-US" smtClean="0"/>
               <a:t>Fifth level</a:t>
             </a:r>
+            <a:endParaRPr lang="en-US"/>
           </a:p>
         </p:txBody>
       </p:sp>
@@ -491,7 +479,7 @@
           <a:p>
             <a:fld id="{5BCAD085-E8A6-8845-BD4E-CB4CCA059FC4}" type="datetimeFigureOut">
               <a:rPr lang="en-US" smtClean="0"/>
-              <a:t>8/29/2026</a:t>
+              <a:t>1/27/13</a:t>
             </a:fld>
             <a:endParaRPr lang="en-US"/>
           </a:p>
@@ -590,9 +578,10 @@
           <a:lstStyle/>
           <a:p>
             <a:r>
-              <a:rPr lang="en-US"/>
+              <a:rPr lang="en-US" smtClean="0"/>
               <a:t>Click to edit Master title style</a:t>
             </a:r>
+            <a:endParaRPr lang="en-US"/>
           </a:p>
         </p:txBody>
       </p:sp>
@@ -618,37 +607,38 @@
           <a:p>
             <a:pPr lvl="0"/>
             <a:r>
-              <a:rPr lang="en-US"/>
+              <a:rPr lang="en-US" smtClean="0"/>
               <a:t>Click to edit Master text styles</a:t>
             </a:r>
           </a:p>
           <a:p>
             <a:pPr lvl="1"/>
             <a:r>
-              <a:rPr lang="en-US"/>
+              <a:rPr lang="en-US" smtClean="0"/>
               <a:t>Second level</a:t>
             </a:r>
           </a:p>
           <a:p>
             <a:pPr lvl="2"/>
             <a:r>
-              <a:rPr lang="en-US"/>
+              <a:rPr lang="en-US" smtClean="0"/>
               <a:t>Third level</a:t>
             </a:r>
           </a:p>
           <a:p>
             <a:pPr lvl="3"/>
             <a:r>
-              <a:rPr lang="en-US"/>
+              <a:rPr lang="en-US" smtClean="0"/>
               <a:t>Fourth level</a:t>
             </a:r>
           </a:p>
           <a:p>
             <a:pPr lvl="4"/>
             <a:r>
-              <a:rPr lang="en-US"/>
+              <a:rPr lang="en-US" smtClean="0"/>
               <a:t>Fifth level</a:t>
             </a:r>
+            <a:endParaRPr lang="en-US"/>
           </a:p>
         </p:txBody>
       </p:sp>
@@ -669,7 +659,7 @@
           <a:p>
             <a:fld id="{5BCAD085-E8A6-8845-BD4E-CB4CCA059FC4}" type="datetimeFigureOut">
               <a:rPr lang="en-US" smtClean="0"/>
-              <a:t>8/29/2026</a:t>
+              <a:t>1/27/13</a:t>
             </a:fld>
             <a:endParaRPr lang="en-US"/>
           </a:p>
@@ -763,9 +753,10 @@
           <a:lstStyle/>
           <a:p>
             <a:r>
-              <a:rPr lang="en-US"/>
+              <a:rPr lang="en-US" smtClean="0"/>
               <a:t>Click to edit Master title style</a:t>
             </a:r>
+            <a:endParaRPr lang="en-US"/>
           </a:p>
         </p:txBody>
       </p:sp>
@@ -786,37 +777,38 @@
           <a:p>
             <a:pPr lvl="0"/>
             <a:r>
-              <a:rPr lang="en-US"/>
+              <a:rPr lang="en-US" smtClean="0"/>
               <a:t>Click to edit Master text styles</a:t>
             </a:r>
           </a:p>
           <a:p>
             <a:pPr lvl="1"/>
             <a:r>
-              <a:rPr lang="en-US"/>
+              <a:rPr lang="en-US" smtClean="0"/>
               <a:t>Second level</a:t>
             </a:r>
           </a:p>
           <a:p>
             <a:pPr lvl="2"/>
             <a:r>
-              <a:rPr lang="en-US"/>
+              <a:rPr lang="en-US" smtClean="0"/>
               <a:t>Third level</a:t>
             </a:r>
           </a:p>
           <a:p>
             <a:pPr lvl="3"/>
             <a:r>
-              <a:rPr lang="en-US"/>
+              <a:rPr lang="en-US" smtClean="0"/>
               <a:t>Fourth level</a:t>
             </a:r>
           </a:p>
           <a:p>
             <a:pPr lvl="4"/>
             <a:r>
-              <a:rPr lang="en-US"/>
+              <a:rPr lang="en-US" smtClean="0"/>
               <a:t>Fifth level</a:t>
             </a:r>
+            <a:endParaRPr lang="en-US"/>
           </a:p>
         </p:txBody>
       </p:sp>
@@ -837,7 +829,7 @@
           <a:p>
             <a:fld id="{5BCAD085-E8A6-8845-BD4E-CB4CCA059FC4}" type="datetimeFigureOut">
               <a:rPr lang="en-US" smtClean="0"/>
-              <a:t>8/29/2026</a:t>
+              <a:t>1/27/13</a:t>
             </a:fld>
             <a:endParaRPr lang="en-US"/>
           </a:p>
@@ -940,9 +932,10 @@
           </a:lstStyle>
           <a:p>
             <a:r>
-              <a:rPr lang="en-US"/>
+              <a:rPr lang="en-US" smtClean="0"/>
               <a:t>Click to edit Master title style</a:t>
             </a:r>
+            <a:endParaRPr lang="en-US"/>
           </a:p>
         </p:txBody>
       </p:sp>
@@ -1059,7 +1052,7 @@
           <a:p>
             <a:pPr lvl="0"/>
             <a:r>
-              <a:rPr lang="en-US"/>
+              <a:rPr lang="en-US" smtClean="0"/>
               <a:t>Click to edit Master text styles</a:t>
             </a:r>
           </a:p>
@@ -1082,7 +1075,7 @@
           <a:p>
             <a:fld id="{5BCAD085-E8A6-8845-BD4E-CB4CCA059FC4}" type="datetimeFigureOut">
               <a:rPr lang="en-US" smtClean="0"/>
-              <a:t>8/29/2026</a:t>
+              <a:t>1/27/13</a:t>
             </a:fld>
             <a:endParaRPr lang="en-US"/>
           </a:p>
@@ -1176,9 +1169,10 @@
           <a:lstStyle/>
           <a:p>
             <a:r>
-              <a:rPr lang="en-US"/>
+              <a:rPr lang="en-US" smtClean="0"/>
               <a:t>Click to edit Master title style</a:t>
             </a:r>
+            <a:endParaRPr lang="en-US"/>
           </a:p>
         </p:txBody>
       </p:sp>
@@ -1232,37 +1226,38 @@
           <a:p>
             <a:pPr lvl="0"/>
             <a:r>
-              <a:rPr lang="en-US"/>
+              <a:rPr lang="en-US" smtClean="0"/>
               <a:t>Click to edit Master text styles</a:t>
             </a:r>
           </a:p>
           <a:p>
             <a:pPr lvl="1"/>
             <a:r>
-              <a:rPr lang="en-US"/>
+              <a:rPr lang="en-US" smtClean="0"/>
               <a:t>Second level</a:t>
             </a:r>
           </a:p>
           <a:p>
             <a:pPr lvl="2"/>
             <a:r>
-              <a:rPr lang="en-US"/>
+              <a:rPr lang="en-US" smtClean="0"/>
               <a:t>Third level</a:t>
             </a:r>
           </a:p>
           <a:p>
             <a:pPr lvl="3"/>
             <a:r>
-              <a:rPr lang="en-US"/>
+              <a:rPr lang="en-US" smtClean="0"/>
               <a:t>Fourth level</a:t>
             </a:r>
           </a:p>
           <a:p>
             <a:pPr lvl="4"/>
             <a:r>
-              <a:rPr lang="en-US"/>
+              <a:rPr lang="en-US" smtClean="0"/>
               <a:t>Fifth level</a:t>
             </a:r>
+            <a:endParaRPr lang="en-US"/>
           </a:p>
         </p:txBody>
       </p:sp>
@@ -1316,37 +1311,38 @@
           <a:p>
             <a:pPr lvl="0"/>
             <a:r>
-              <a:rPr lang="en-US"/>
+              <a:rPr lang="en-US" smtClean="0"/>
               <a:t>Click to edit Master text styles</a:t>
             </a:r>
           </a:p>
           <a:p>
             <a:pPr lvl="1"/>
             <a:r>
-              <a:rPr lang="en-US"/>
+              <a:rPr lang="en-US" smtClean="0"/>
               <a:t>Second level</a:t>
             </a:r>
           </a:p>
           <a:p>
             <a:pPr lvl="2"/>
             <a:r>
-              <a:rPr lang="en-US"/>
+              <a:rPr lang="en-US" smtClean="0"/>
               <a:t>Third level</a:t>
             </a:r>
           </a:p>
           <a:p>
             <a:pPr lvl="3"/>
             <a:r>
-              <a:rPr lang="en-US"/>
+              <a:rPr lang="en-US" smtClean="0"/>
               <a:t>Fourth level</a:t>
             </a:r>
           </a:p>
           <a:p>
             <a:pPr lvl="4"/>
             <a:r>
-              <a:rPr lang="en-US"/>
+              <a:rPr lang="en-US" smtClean="0"/>
               <a:t>Fifth level</a:t>
             </a:r>
+            <a:endParaRPr lang="en-US"/>
           </a:p>
         </p:txBody>
       </p:sp>
@@ -1367,7 +1363,7 @@
           <a:p>
             <a:fld id="{5BCAD085-E8A6-8845-BD4E-CB4CCA059FC4}" type="datetimeFigureOut">
               <a:rPr lang="en-US" smtClean="0"/>
-              <a:t>8/29/2026</a:t>
+              <a:t>1/27/13</a:t>
             </a:fld>
             <a:endParaRPr lang="en-US"/>
           </a:p>
@@ -1465,9 +1461,10 @@
           </a:lstStyle>
           <a:p>
             <a:r>
-              <a:rPr lang="en-US"/>
+              <a:rPr lang="en-US" smtClean="0"/>
               <a:t>Click to edit Master title style</a:t>
             </a:r>
+            <a:endParaRPr lang="en-US"/>
           </a:p>
         </p:txBody>
       </p:sp>
@@ -1530,7 +1527,7 @@
           <a:p>
             <a:pPr lvl="0"/>
             <a:r>
-              <a:rPr lang="en-US"/>
+              <a:rPr lang="en-US" smtClean="0"/>
               <a:t>Click to edit Master text styles</a:t>
             </a:r>
           </a:p>
@@ -1586,37 +1583,38 @@
           <a:p>
             <a:pPr lvl="0"/>
             <a:r>
-              <a:rPr lang="en-US"/>
+              <a:rPr lang="en-US" smtClean="0"/>
               <a:t>Click to edit Master text styles</a:t>
             </a:r>
           </a:p>
           <a:p>
             <a:pPr lvl="1"/>
             <a:r>
-              <a:rPr lang="en-US"/>
+              <a:rPr lang="en-US" smtClean="0"/>
               <a:t>Second level</a:t>
             </a:r>
           </a:p>
           <a:p>
             <a:pPr lvl="2"/>
             <a:r>
-              <a:rPr lang="en-US"/>
+              <a:rPr lang="en-US" smtClean="0"/>
               <a:t>Third level</a:t>
             </a:r>
           </a:p>
           <a:p>
             <a:pPr lvl="3"/>
             <a:r>
-              <a:rPr lang="en-US"/>
+              <a:rPr lang="en-US" smtClean="0"/>
               <a:t>Fourth level</a:t>
             </a:r>
           </a:p>
           <a:p>
             <a:pPr lvl="4"/>
             <a:r>
-              <a:rPr lang="en-US"/>
+              <a:rPr lang="en-US" smtClean="0"/>
               <a:t>Fifth level</a:t>
             </a:r>
+            <a:endParaRPr lang="en-US"/>
           </a:p>
         </p:txBody>
       </p:sp>
@@ -1679,7 +1677,7 @@
           <a:p>
             <a:pPr lvl="0"/>
             <a:r>
-              <a:rPr lang="en-US"/>
+              <a:rPr lang="en-US" smtClean="0"/>
               <a:t>Click to edit Master text styles</a:t>
             </a:r>
           </a:p>
@@ -1735,37 +1733,38 @@
           <a:p>
             <a:pPr lvl="0"/>
             <a:r>
-              <a:rPr lang="en-US"/>
+              <a:rPr lang="en-US" smtClean="0"/>
               <a:t>Click to edit Master text styles</a:t>
             </a:r>
           </a:p>
           <a:p>
             <a:pPr lvl="1"/>
             <a:r>
-              <a:rPr lang="en-US"/>
+              <a:rPr lang="en-US" smtClean="0"/>
               <a:t>Second level</a:t>
             </a:r>
           </a:p>
           <a:p>
             <a:pPr lvl="2"/>
             <a:r>
-              <a:rPr lang="en-US"/>
+              <a:rPr lang="en-US" smtClean="0"/>
               <a:t>Third level</a:t>
             </a:r>
           </a:p>
           <a:p>
             <a:pPr lvl="3"/>
             <a:r>
-              <a:rPr lang="en-US"/>
+              <a:rPr lang="en-US" smtClean="0"/>
               <a:t>Fourth level</a:t>
             </a:r>
           </a:p>
           <a:p>
             <a:pPr lvl="4"/>
             <a:r>
-              <a:rPr lang="en-US"/>
+              <a:rPr lang="en-US" smtClean="0"/>
               <a:t>Fifth level</a:t>
             </a:r>
+            <a:endParaRPr lang="en-US"/>
           </a:p>
         </p:txBody>
       </p:sp>
@@ -1786,7 +1785,7 @@
           <a:p>
             <a:fld id="{5BCAD085-E8A6-8845-BD4E-CB4CCA059FC4}" type="datetimeFigureOut">
               <a:rPr lang="en-US" smtClean="0"/>
-              <a:t>8/29/2026</a:t>
+              <a:t>1/27/13</a:t>
             </a:fld>
             <a:endParaRPr lang="en-US"/>
           </a:p>
@@ -1880,9 +1879,10 @@
           <a:lstStyle/>
           <a:p>
             <a:r>
-              <a:rPr lang="en-US"/>
+              <a:rPr lang="en-US" smtClean="0"/>
               <a:t>Click to edit Master title style</a:t>
             </a:r>
+            <a:endParaRPr lang="en-US"/>
           </a:p>
         </p:txBody>
       </p:sp>
@@ -1903,7 +1903,7 @@
           <a:p>
             <a:fld id="{5BCAD085-E8A6-8845-BD4E-CB4CCA059FC4}" type="datetimeFigureOut">
               <a:rPr lang="en-US" smtClean="0"/>
-              <a:t>8/29/2026</a:t>
+              <a:t>1/27/13</a:t>
             </a:fld>
             <a:endParaRPr lang="en-US"/>
           </a:p>
@@ -1998,7 +1998,7 @@
           <a:p>
             <a:fld id="{5BCAD085-E8A6-8845-BD4E-CB4CCA059FC4}" type="datetimeFigureOut">
               <a:rPr lang="en-US" smtClean="0"/>
-              <a:t>8/29/2026</a:t>
+              <a:t>1/27/13</a:t>
             </a:fld>
             <a:endParaRPr lang="en-US"/>
           </a:p>
@@ -2101,9 +2101,10 @@
           </a:lstStyle>
           <a:p>
             <a:r>
-              <a:rPr lang="en-US"/>
+              <a:rPr lang="en-US" smtClean="0"/>
               <a:t>Click to edit Master title style</a:t>
             </a:r>
+            <a:endParaRPr lang="en-US"/>
           </a:p>
         </p:txBody>
       </p:sp>
@@ -2157,37 +2158,38 @@
           <a:p>
             <a:pPr lvl="0"/>
             <a:r>
-              <a:rPr lang="en-US"/>
+              <a:rPr lang="en-US" smtClean="0"/>
               <a:t>Click to edit Master text styles</a:t>
             </a:r>
           </a:p>
           <a:p>
             <a:pPr lvl="1"/>
             <a:r>
-              <a:rPr lang="en-US"/>
+              <a:rPr lang="en-US" smtClean="0"/>
               <a:t>Second level</a:t>
             </a:r>
           </a:p>
           <a:p>
             <a:pPr lvl="2"/>
             <a:r>
-              <a:rPr lang="en-US"/>
+              <a:rPr lang="en-US" smtClean="0"/>
               <a:t>Third level</a:t>
             </a:r>
           </a:p>
           <a:p>
             <a:pPr lvl="3"/>
             <a:r>
-              <a:rPr lang="en-US"/>
+              <a:rPr lang="en-US" smtClean="0"/>
               <a:t>Fourth level</a:t>
             </a:r>
           </a:p>
           <a:p>
             <a:pPr lvl="4"/>
             <a:r>
-              <a:rPr lang="en-US"/>
+              <a:rPr lang="en-US" smtClean="0"/>
               <a:t>Fifth level</a:t>
             </a:r>
+            <a:endParaRPr lang="en-US"/>
           </a:p>
         </p:txBody>
       </p:sp>
@@ -2250,7 +2252,7 @@
           <a:p>
             <a:pPr lvl="0"/>
             <a:r>
-              <a:rPr lang="en-US"/>
+              <a:rPr lang="en-US" smtClean="0"/>
               <a:t>Click to edit Master text styles</a:t>
             </a:r>
           </a:p>
@@ -2273,7 +2275,7 @@
           <a:p>
             <a:fld id="{5BCAD085-E8A6-8845-BD4E-CB4CCA059FC4}" type="datetimeFigureOut">
               <a:rPr lang="en-US" smtClean="0"/>
-              <a:t>8/29/2026</a:t>
+              <a:t>1/27/13</a:t>
             </a:fld>
             <a:endParaRPr lang="en-US"/>
           </a:p>
@@ -2376,9 +2378,10 @@
           </a:lstStyle>
           <a:p>
             <a:r>
-              <a:rPr lang="en-US"/>
+              <a:rPr lang="en-US" smtClean="0"/>
               <a:t>Click to edit Master title style</a:t>
             </a:r>
+            <a:endParaRPr lang="en-US"/>
           </a:p>
         </p:txBody>
       </p:sp>
@@ -2502,7 +2505,7 @@
           <a:p>
             <a:pPr lvl="0"/>
             <a:r>
-              <a:rPr lang="en-US"/>
+              <a:rPr lang="en-US" smtClean="0"/>
               <a:t>Click to edit Master text styles</a:t>
             </a:r>
           </a:p>
@@ -2525,7 +2528,7 @@
           <a:p>
             <a:fld id="{5BCAD085-E8A6-8845-BD4E-CB4CCA059FC4}" type="datetimeFigureOut">
               <a:rPr lang="en-US" smtClean="0"/>
-              <a:t>8/29/2026</a:t>
+              <a:t>1/27/13</a:t>
             </a:fld>
             <a:endParaRPr lang="en-US"/>
           </a:p>
@@ -2634,9 +2637,10 @@
           <a:lstStyle/>
           <a:p>
             <a:r>
-              <a:rPr lang="en-US"/>
+              <a:rPr lang="en-US" smtClean="0"/>
               <a:t>Click to edit Master title style</a:t>
             </a:r>
+            <a:endParaRPr lang="en-US"/>
           </a:p>
         </p:txBody>
       </p:sp>
@@ -2667,37 +2671,38 @@
           <a:p>
             <a:pPr lvl="0"/>
             <a:r>
-              <a:rPr lang="en-US"/>
+              <a:rPr lang="en-US" smtClean="0"/>
               <a:t>Click to edit Master text styles</a:t>
             </a:r>
           </a:p>
           <a:p>
             <a:pPr lvl="1"/>
             <a:r>
-              <a:rPr lang="en-US"/>
+              <a:rPr lang="en-US" smtClean="0"/>
               <a:t>Second level</a:t>
             </a:r>
           </a:p>
           <a:p>
             <a:pPr lvl="2"/>
             <a:r>
-              <a:rPr lang="en-US"/>
+              <a:rPr lang="en-US" smtClean="0"/>
               <a:t>Third level</a:t>
             </a:r>
           </a:p>
           <a:p>
             <a:pPr lvl="3"/>
             <a:r>
-              <a:rPr lang="en-US"/>
+              <a:rPr lang="en-US" smtClean="0"/>
               <a:t>Fourth level</a:t>
             </a:r>
           </a:p>
           <a:p>
             <a:pPr lvl="4"/>
             <a:r>
-              <a:rPr lang="en-US"/>
+              <a:rPr lang="en-US" smtClean="0"/>
               <a:t>Fifth level</a:t>
             </a:r>
+            <a:endParaRPr lang="en-US"/>
           </a:p>
         </p:txBody>
       </p:sp>
@@ -2736,7 +2741,7 @@
           <a:p>
             <a:fld id="{5BCAD085-E8A6-8845-BD4E-CB4CCA059FC4}" type="datetimeFigureOut">
               <a:rPr lang="en-US" smtClean="0"/>
-              <a:t>8/29/2026</a:t>
+              <a:t>1/27/13</a:t>
             </a:fld>
             <a:endParaRPr lang="en-US"/>
           </a:p>
@@ -3095,7 +3100,7 @@
 </file>
 
 <file path=ppt/slides/slide1.xml><?xml version="1.0" encoding="utf-8"?>
-<p:sld xmlns:a="http://schemas.openxmlformats.org/drawingml/2006/main" xmlns:r="http://schemas.openxmlformats.org/officeDocument/2006/relationships" xmlns:p="http://schemas.openxmlformats.org/presentationml/2006/main">
+<p:sld xmlns:a="http://schemas.openxmlformats.org/drawingml/2006/main" xmlns:p="http://schemas.openxmlformats.org/presentationml/2006/main" xmlns:r="http://schemas.openxmlformats.org/officeDocument/2006/relationships">
   <p:cSld>
     <p:spTree>
       <p:nvGrpSpPr>
@@ -3103,14 +3108,7 @@
         <p:cNvGrpSpPr/>
         <p:nvPr/>
       </p:nvGrpSpPr>
-      <p:grpSpPr>
-        <a:xfrm>
-          <a:off x="0" y="0"/>
-          <a:ext cx="0" cy="0"/>
-          <a:chOff x="0" y="0"/>
-          <a:chExt cx="0" cy="0"/>
-        </a:xfrm>
-      </p:grpSpPr>
+      <p:grpSpPr/>
       <p:sp>
         <p:nvSpPr>
           <p:cNvPr id="2" name="Rectangle 1"/>
@@ -3151,7 +3149,6 @@
           <a:lstStyle/>
           <a:p>
             <a:pPr algn="ctr"/>
-            <a:endParaRPr/>
           </a:p>
         </p:txBody>
       </p:sp>
@@ -3195,7 +3192,6 @@
           <a:lstStyle/>
           <a:p>
             <a:pPr algn="ctr"/>
-            <a:endParaRPr/>
           </a:p>
         </p:txBody>
       </p:sp>
@@ -3216,7 +3212,7 @@
           <a:noFill/>
         </p:spPr>
         <p:txBody>
-          <a:bodyPr wrap="square" lIns="0" tIns="0" rIns="0" bIns="0">
+          <a:bodyPr wrap="square" lIns="0" rIns="0" tIns="0" bIns="0">
             <a:spAutoFit/>
           </a:bodyPr>
           <a:lstStyle/>
@@ -3296,7 +3292,7 @@
           <a:noFill/>
         </p:spPr>
         <p:txBody>
-          <a:bodyPr wrap="square" lIns="0" tIns="0" rIns="0" bIns="0">
+          <a:bodyPr wrap="square" lIns="0" tIns="0" bIns="0" rIns="0">
             <a:spAutoFit/>
           </a:bodyPr>
           <a:lstStyle/>
@@ -3313,7 +3309,6 @@
               </a:defRPr>
             </a:pPr>
             <a:r>
-              <a:rPr dirty="0"/>
               <a:t>A Resilient, AI-Powered Environmental Monitoring Network for Early Hazard Detection</a:t>
             </a:r>
           </a:p>
@@ -3327,13 +3322,9 @@
               </a:defRPr>
             </a:pPr>
             <a:r>
-              <a:rPr dirty="0"/>
               <a:t>Submitted By:</a:t>
             </a:r>
-            <a:br>
-              <a:rPr dirty="0"/>
-            </a:br>
-            <a:endParaRPr dirty="0"/>
+            <a:br/>
           </a:p>
           <a:p>
             <a:pPr>
@@ -3345,7 +3336,6 @@
               </a:defRPr>
             </a:pPr>
             <a:r>
-              <a:rPr dirty="0"/>
               <a:t>  • Sam (Reg. No: CSE-2026-01)</a:t>
             </a:r>
           </a:p>
@@ -3359,7 +3349,6 @@
               </a:defRPr>
             </a:pPr>
             <a:r>
-              <a:rPr dirty="0"/>
               <a:t>  • Alex (Reg. No: CSE-2026-02)</a:t>
             </a:r>
           </a:p>
@@ -3373,7 +3362,6 @@
               </a:defRPr>
             </a:pPr>
             <a:r>
-              <a:rPr dirty="0"/>
               <a:t>  • Jordan (Reg. No: CSE-2026-03)</a:t>
             </a:r>
           </a:p>
@@ -3383,7 +3371,6 @@
                 <a:spcPts val="2000"/>
               </a:spcAft>
             </a:pPr>
-            <a:endParaRPr dirty="0"/>
           </a:p>
           <a:p>
             <a:pPr>
@@ -3395,14 +3382,10 @@
               </a:defRPr>
             </a:pPr>
             <a:r>
-              <a:rPr dirty="0"/>
               <a:t>Project Guide:</a:t>
             </a:r>
-            <a:br>
-              <a:rPr dirty="0"/>
-            </a:br>
-            <a:r>
-              <a:rPr dirty="0"/>
+            <a:br/>
+            <a:r>
               <a:t>  Dr. A. K. Sharma, Professor, Dept. of CSE</a:t>
             </a:r>
           </a:p>
@@ -3417,7 +3400,7 @@
 </file>
 
 <file path=ppt/slides/slide10.xml><?xml version="1.0" encoding="utf-8"?>
-<p:sld xmlns:a="http://schemas.openxmlformats.org/drawingml/2006/main" xmlns:r="http://schemas.openxmlformats.org/officeDocument/2006/relationships" xmlns:p="http://schemas.openxmlformats.org/presentationml/2006/main">
+<p:sld xmlns:a="http://schemas.openxmlformats.org/drawingml/2006/main" xmlns:p="http://schemas.openxmlformats.org/presentationml/2006/main" xmlns:r="http://schemas.openxmlformats.org/officeDocument/2006/relationships">
   <p:cSld>
     <p:spTree>
       <p:nvGrpSpPr>
@@ -3425,14 +3408,7 @@
         <p:cNvGrpSpPr/>
         <p:nvPr/>
       </p:nvGrpSpPr>
-      <p:grpSpPr>
-        <a:xfrm>
-          <a:off x="0" y="0"/>
-          <a:ext cx="0" cy="0"/>
-          <a:chOff x="0" y="0"/>
-          <a:chExt cx="0" cy="0"/>
-        </a:xfrm>
-      </p:grpSpPr>
+      <p:grpSpPr/>
       <p:sp>
         <p:nvSpPr>
           <p:cNvPr id="2" name="Rectangle 1"/>
@@ -3473,7 +3449,6 @@
           <a:lstStyle/>
           <a:p>
             <a:pPr algn="ctr"/>
-            <a:endParaRPr/>
           </a:p>
         </p:txBody>
       </p:sp>
@@ -3494,7 +3469,7 @@
           <a:noFill/>
         </p:spPr>
         <p:txBody>
-          <a:bodyPr wrap="square" lIns="0" tIns="0" rIns="0" bIns="0">
+          <a:bodyPr wrap="square" lIns="0" tIns="0" bIns="0" rIns="0">
             <a:spAutoFit/>
           </a:bodyPr>
           <a:lstStyle/>
@@ -3551,7 +3526,7 @@
           </a:fontRef>
         </p:style>
         <p:txBody>
-          <a:bodyPr wrap="square" lIns="45720" rIns="45720" rtlCol="0" anchor="ctr"/>
+          <a:bodyPr rtlCol="0" anchor="ctr" wrap="square" lIns="45720" rIns="45720"/>
           <a:lstStyle/>
           <a:p>
             <a:pPr algn="ctr">
@@ -3608,7 +3583,6 @@
           <a:lstStyle/>
           <a:p>
             <a:pPr algn="ctr"/>
-            <a:endParaRPr/>
           </a:p>
         </p:txBody>
       </p:sp>
@@ -3650,7 +3624,7 @@
           </a:fontRef>
         </p:style>
         <p:txBody>
-          <a:bodyPr wrap="square" lIns="45720" rIns="45720" rtlCol="0" anchor="ctr"/>
+          <a:bodyPr rtlCol="0" anchor="ctr" wrap="square" lIns="45720" rIns="45720"/>
           <a:lstStyle/>
           <a:p>
             <a:pPr algn="ctr">
@@ -3707,7 +3681,6 @@
           <a:lstStyle/>
           <a:p>
             <a:pPr algn="ctr"/>
-            <a:endParaRPr/>
           </a:p>
         </p:txBody>
       </p:sp>
@@ -3749,7 +3722,7 @@
           </a:fontRef>
         </p:style>
         <p:txBody>
-          <a:bodyPr wrap="square" lIns="45720" rIns="45720" rtlCol="0" anchor="ctr"/>
+          <a:bodyPr rtlCol="0" anchor="ctr" wrap="square" lIns="45720" rIns="45720"/>
           <a:lstStyle/>
           <a:p>
             <a:pPr algn="ctr">
@@ -3806,7 +3779,6 @@
           <a:lstStyle/>
           <a:p>
             <a:pPr algn="ctr"/>
-            <a:endParaRPr/>
           </a:p>
         </p:txBody>
       </p:sp>
@@ -3848,7 +3820,7 @@
           </a:fontRef>
         </p:style>
         <p:txBody>
-          <a:bodyPr wrap="square" lIns="45720" rIns="45720" rtlCol="0" anchor="ctr"/>
+          <a:bodyPr rtlCol="0" anchor="ctr" wrap="square" lIns="45720" rIns="45720"/>
           <a:lstStyle/>
           <a:p>
             <a:pPr algn="ctr">
@@ -3905,7 +3877,6 @@
           <a:lstStyle/>
           <a:p>
             <a:pPr algn="ctr"/>
-            <a:endParaRPr/>
           </a:p>
         </p:txBody>
       </p:sp>
@@ -3947,7 +3918,7 @@
           </a:fontRef>
         </p:style>
         <p:txBody>
-          <a:bodyPr wrap="square" lIns="45720" rIns="45720" rtlCol="0" anchor="ctr"/>
+          <a:bodyPr rtlCol="0" anchor="ctr" wrap="square" lIns="45720" rIns="45720"/>
           <a:lstStyle/>
           <a:p>
             <a:pPr algn="ctr">
@@ -3981,7 +3952,7 @@
           <a:noFill/>
         </p:spPr>
         <p:txBody>
-          <a:bodyPr wrap="square" lIns="0" tIns="0" rIns="0" bIns="0">
+          <a:bodyPr wrap="square" lIns="0" tIns="0" bIns="0" rIns="0">
             <a:spAutoFit/>
           </a:bodyPr>
           <a:lstStyle/>
@@ -4141,7 +4112,7 @@
 </file>
 
 <file path=ppt/slides/slide11.xml><?xml version="1.0" encoding="utf-8"?>
-<p:sld xmlns:a="http://schemas.openxmlformats.org/drawingml/2006/main" xmlns:r="http://schemas.openxmlformats.org/officeDocument/2006/relationships" xmlns:p="http://schemas.openxmlformats.org/presentationml/2006/main">
+<p:sld xmlns:a="http://schemas.openxmlformats.org/drawingml/2006/main" xmlns:p="http://schemas.openxmlformats.org/presentationml/2006/main" xmlns:r="http://schemas.openxmlformats.org/officeDocument/2006/relationships">
   <p:cSld>
     <p:spTree>
       <p:nvGrpSpPr>
@@ -4149,14 +4120,7 @@
         <p:cNvGrpSpPr/>
         <p:nvPr/>
       </p:nvGrpSpPr>
-      <p:grpSpPr>
-        <a:xfrm>
-          <a:off x="0" y="0"/>
-          <a:ext cx="0" cy="0"/>
-          <a:chOff x="0" y="0"/>
-          <a:chExt cx="0" cy="0"/>
-        </a:xfrm>
-      </p:grpSpPr>
+      <p:grpSpPr/>
       <p:sp>
         <p:nvSpPr>
           <p:cNvPr id="2" name="Rectangle 1"/>
@@ -4197,7 +4161,6 @@
           <a:lstStyle/>
           <a:p>
             <a:pPr algn="ctr"/>
-            <a:endParaRPr/>
           </a:p>
         </p:txBody>
       </p:sp>
@@ -4218,7 +4181,7 @@
           <a:noFill/>
         </p:spPr>
         <p:txBody>
-          <a:bodyPr wrap="square" lIns="0" tIns="0" rIns="0" bIns="0">
+          <a:bodyPr wrap="square" lIns="0" tIns="0" bIns="0" rIns="0">
             <a:spAutoFit/>
           </a:bodyPr>
           <a:lstStyle/>
@@ -4275,7 +4238,7 @@
           </a:fontRef>
         </p:style>
         <p:txBody>
-          <a:bodyPr wrap="square" lIns="45720" rIns="45720" rtlCol="0" anchor="ctr"/>
+          <a:bodyPr rtlCol="0" anchor="ctr" wrap="square" lIns="45720" rIns="45720"/>
           <a:lstStyle/>
           <a:p>
             <a:pPr algn="ctr">
@@ -4336,7 +4299,6 @@
           <a:lstStyle/>
           <a:p>
             <a:pPr algn="ctr"/>
-            <a:endParaRPr/>
           </a:p>
         </p:txBody>
       </p:sp>
@@ -4378,7 +4340,7 @@
           </a:fontRef>
         </p:style>
         <p:txBody>
-          <a:bodyPr wrap="square" lIns="45720" rIns="45720" rtlCol="0" anchor="ctr"/>
+          <a:bodyPr rtlCol="0" anchor="ctr" wrap="square" lIns="45720" rIns="45720"/>
           <a:lstStyle/>
           <a:p>
             <a:pPr algn="ctr">
@@ -4439,7 +4401,6 @@
           <a:lstStyle/>
           <a:p>
             <a:pPr algn="ctr"/>
-            <a:endParaRPr/>
           </a:p>
         </p:txBody>
       </p:sp>
@@ -4481,7 +4442,7 @@
           </a:fontRef>
         </p:style>
         <p:txBody>
-          <a:bodyPr wrap="square" lIns="45720" rIns="45720" rtlCol="0" anchor="ctr"/>
+          <a:bodyPr rtlCol="0" anchor="ctr" wrap="square" lIns="45720" rIns="45720"/>
           <a:lstStyle/>
           <a:p>
             <a:pPr algn="ctr">
@@ -4542,7 +4503,6 @@
           <a:lstStyle/>
           <a:p>
             <a:pPr algn="ctr"/>
-            <a:endParaRPr/>
           </a:p>
         </p:txBody>
       </p:sp>
@@ -4584,7 +4544,7 @@
           </a:fontRef>
         </p:style>
         <p:txBody>
-          <a:bodyPr wrap="square" lIns="45720" rIns="45720" rtlCol="0" anchor="ctr"/>
+          <a:bodyPr rtlCol="0" anchor="ctr" wrap="square" lIns="45720" rIns="45720"/>
           <a:lstStyle/>
           <a:p>
             <a:pPr algn="ctr">
@@ -4645,7 +4605,6 @@
           <a:lstStyle/>
           <a:p>
             <a:pPr algn="ctr"/>
-            <a:endParaRPr/>
           </a:p>
         </p:txBody>
       </p:sp>
@@ -4687,7 +4646,7 @@
           </a:fontRef>
         </p:style>
         <p:txBody>
-          <a:bodyPr wrap="square" lIns="45720" rIns="45720" rtlCol="0" anchor="ctr"/>
+          <a:bodyPr rtlCol="0" anchor="ctr" wrap="square" lIns="45720" rIns="45720"/>
           <a:lstStyle/>
           <a:p>
             <a:pPr algn="ctr">
@@ -4748,7 +4707,6 @@
           <a:lstStyle/>
           <a:p>
             <a:pPr algn="ctr"/>
-            <a:endParaRPr/>
           </a:p>
         </p:txBody>
       </p:sp>
@@ -4790,7 +4748,7 @@
           </a:fontRef>
         </p:style>
         <p:txBody>
-          <a:bodyPr wrap="square" lIns="45720" rIns="45720" rtlCol="0" anchor="ctr"/>
+          <a:bodyPr rtlCol="0" anchor="ctr" wrap="square" lIns="45720" rIns="45720"/>
           <a:lstStyle/>
           <a:p>
             <a:pPr algn="ctr">
@@ -4851,7 +4809,6 @@
           <a:lstStyle/>
           <a:p>
             <a:pPr algn="ctr"/>
-            <a:endParaRPr/>
           </a:p>
         </p:txBody>
       </p:sp>
@@ -4893,7 +4850,7 @@
           </a:fontRef>
         </p:style>
         <p:txBody>
-          <a:bodyPr wrap="square" lIns="45720" rIns="45720" rtlCol="0" anchor="ctr"/>
+          <a:bodyPr rtlCol="0" anchor="ctr" wrap="square" lIns="45720" rIns="45720"/>
           <a:lstStyle/>
           <a:p>
             <a:pPr algn="ctr">
@@ -4954,7 +4911,6 @@
           <a:lstStyle/>
           <a:p>
             <a:pPr algn="ctr"/>
-            <a:endParaRPr/>
           </a:p>
         </p:txBody>
       </p:sp>
@@ -4996,7 +4952,7 @@
           </a:fontRef>
         </p:style>
         <p:txBody>
-          <a:bodyPr wrap="square" lIns="45720" rIns="45720" rtlCol="0" anchor="ctr"/>
+          <a:bodyPr rtlCol="0" anchor="ctr" wrap="square" lIns="45720" rIns="45720"/>
           <a:lstStyle/>
           <a:p>
             <a:pPr algn="ctr">
@@ -5034,7 +4990,7 @@
           <a:noFill/>
         </p:spPr>
         <p:txBody>
-          <a:bodyPr wrap="square" lIns="0" tIns="0" rIns="0" bIns="0">
+          <a:bodyPr wrap="square" lIns="0" tIns="0" bIns="0" rIns="0">
             <a:spAutoFit/>
           </a:bodyPr>
           <a:lstStyle/>
@@ -5062,7 +5018,7 @@
 </file>
 
 <file path=ppt/slides/slide12.xml><?xml version="1.0" encoding="utf-8"?>
-<p:sld xmlns:a="http://schemas.openxmlformats.org/drawingml/2006/main" xmlns:r="http://schemas.openxmlformats.org/officeDocument/2006/relationships" xmlns:p="http://schemas.openxmlformats.org/presentationml/2006/main">
+<p:sld xmlns:a="http://schemas.openxmlformats.org/drawingml/2006/main" xmlns:p="http://schemas.openxmlformats.org/presentationml/2006/main" xmlns:r="http://schemas.openxmlformats.org/officeDocument/2006/relationships">
   <p:cSld>
     <p:spTree>
       <p:nvGrpSpPr>
@@ -5070,14 +5026,7 @@
         <p:cNvGrpSpPr/>
         <p:nvPr/>
       </p:nvGrpSpPr>
-      <p:grpSpPr>
-        <a:xfrm>
-          <a:off x="0" y="0"/>
-          <a:ext cx="0" cy="0"/>
-          <a:chOff x="0" y="0"/>
-          <a:chExt cx="0" cy="0"/>
-        </a:xfrm>
-      </p:grpSpPr>
+      <p:grpSpPr/>
       <p:sp>
         <p:nvSpPr>
           <p:cNvPr id="2" name="Rectangle 1"/>
@@ -5118,7 +5067,6 @@
           <a:lstStyle/>
           <a:p>
             <a:pPr algn="ctr"/>
-            <a:endParaRPr/>
           </a:p>
         </p:txBody>
       </p:sp>
@@ -5139,7 +5087,7 @@
           <a:noFill/>
         </p:spPr>
         <p:txBody>
-          <a:bodyPr wrap="square" lIns="0" tIns="0" rIns="0" bIns="0">
+          <a:bodyPr wrap="square" lIns="0" tIns="0" bIns="0" rIns="0">
             <a:spAutoFit/>
           </a:bodyPr>
           <a:lstStyle/>
@@ -5177,25 +5125,13 @@
                 <a:tableStyleId>{5C22544A-7EE6-4342-B048-85BDC9FD1C3A}</a:tableStyleId>
               </a:tblPr>
               <a:tblGrid>
-                <a:gridCol w="2743200">
-                  <a:extLst>
-                    <a:ext uri="{9D8B030D-6E8A-4147-A177-3AD203B41FA5}">
-                      <a16:colId xmlns:a16="http://schemas.microsoft.com/office/drawing/2014/main" val="20000"/>
-                    </a:ext>
-                  </a:extLst>
-                </a:gridCol>
-                <a:gridCol w="7985455">
-                  <a:extLst>
-                    <a:ext uri="{9D8B030D-6E8A-4147-A177-3AD203B41FA5}">
-                      <a16:colId xmlns:a16="http://schemas.microsoft.com/office/drawing/2014/main" val="20001"/>
-                    </a:ext>
-                  </a:extLst>
-                </a:gridCol>
+                <a:gridCol w="2743200"/>
+                <a:gridCol w="7985455"/>
               </a:tblGrid>
               <a:tr h="587828">
                 <a:tc>
                   <a:txBody>
-                    <a:bodyPr/>
+                    <a:bodyPr lIns="73152" rIns="73152" tIns="73152" bIns="73152" wrap="square"/>
                     <a:lstStyle/>
                     <a:p>
                       <a:pPr algn="l">
@@ -5219,7 +5155,7 @@
                 </a:tc>
                 <a:tc>
                   <a:txBody>
-                    <a:bodyPr/>
+                    <a:bodyPr lIns="73152" rIns="73152" tIns="73152" bIns="73152" wrap="square"/>
                     <a:lstStyle/>
                     <a:p>
                       <a:pPr algn="l">
@@ -5241,16 +5177,11 @@
                     </a:solidFill>
                   </a:tcPr>
                 </a:tc>
-                <a:extLst>
-                  <a:ext uri="{0D108BD9-81ED-4DB2-BD59-A6C34878D82A}">
-                    <a16:rowId xmlns:a16="http://schemas.microsoft.com/office/drawing/2014/main" val="10000"/>
-                  </a:ext>
-                </a:extLst>
               </a:tr>
               <a:tr h="587828">
                 <a:tc>
                   <a:txBody>
-                    <a:bodyPr/>
+                    <a:bodyPr lIns="73152" rIns="73152" tIns="73152" bIns="73152" wrap="square"/>
                     <a:lstStyle/>
                     <a:p>
                       <a:pPr algn="l">
@@ -5274,7 +5205,7 @@
                 </a:tc>
                 <a:tc>
                   <a:txBody>
-                    <a:bodyPr/>
+                    <a:bodyPr lIns="73152" rIns="73152" tIns="73152" bIns="73152" wrap="square"/>
                     <a:lstStyle/>
                     <a:p>
                       <a:pPr algn="l">
@@ -5296,16 +5227,11 @@
                     </a:solidFill>
                   </a:tcPr>
                 </a:tc>
-                <a:extLst>
-                  <a:ext uri="{0D108BD9-81ED-4DB2-BD59-A6C34878D82A}">
-                    <a16:rowId xmlns:a16="http://schemas.microsoft.com/office/drawing/2014/main" val="10001"/>
-                  </a:ext>
-                </a:extLst>
               </a:tr>
               <a:tr h="587828">
                 <a:tc>
                   <a:txBody>
-                    <a:bodyPr/>
+                    <a:bodyPr lIns="73152" rIns="73152" tIns="73152" bIns="73152" wrap="square"/>
                     <a:lstStyle/>
                     <a:p>
                       <a:pPr algn="l">
@@ -5329,7 +5255,7 @@
                 </a:tc>
                 <a:tc>
                   <a:txBody>
-                    <a:bodyPr/>
+                    <a:bodyPr lIns="73152" rIns="73152" tIns="73152" bIns="73152" wrap="square"/>
                     <a:lstStyle/>
                     <a:p>
                       <a:pPr algn="l">
@@ -5351,16 +5277,11 @@
                     </a:solidFill>
                   </a:tcPr>
                 </a:tc>
-                <a:extLst>
-                  <a:ext uri="{0D108BD9-81ED-4DB2-BD59-A6C34878D82A}">
-                    <a16:rowId xmlns:a16="http://schemas.microsoft.com/office/drawing/2014/main" val="10002"/>
-                  </a:ext>
-                </a:extLst>
               </a:tr>
               <a:tr h="587828">
                 <a:tc>
                   <a:txBody>
-                    <a:bodyPr/>
+                    <a:bodyPr lIns="73152" rIns="73152" tIns="73152" bIns="73152" wrap="square"/>
                     <a:lstStyle/>
                     <a:p>
                       <a:pPr algn="l">
@@ -5384,7 +5305,7 @@
                 </a:tc>
                 <a:tc>
                   <a:txBody>
-                    <a:bodyPr/>
+                    <a:bodyPr lIns="73152" rIns="73152" tIns="73152" bIns="73152" wrap="square"/>
                     <a:lstStyle/>
                     <a:p>
                       <a:pPr algn="l">
@@ -5406,16 +5327,11 @@
                     </a:solidFill>
                   </a:tcPr>
                 </a:tc>
-                <a:extLst>
-                  <a:ext uri="{0D108BD9-81ED-4DB2-BD59-A6C34878D82A}">
-                    <a16:rowId xmlns:a16="http://schemas.microsoft.com/office/drawing/2014/main" val="10003"/>
-                  </a:ext>
-                </a:extLst>
               </a:tr>
               <a:tr h="587828">
                 <a:tc>
                   <a:txBody>
-                    <a:bodyPr/>
+                    <a:bodyPr lIns="73152" rIns="73152" tIns="73152" bIns="73152" wrap="square"/>
                     <a:lstStyle/>
                     <a:p>
                       <a:pPr algn="l">
@@ -5439,7 +5355,7 @@
                 </a:tc>
                 <a:tc>
                   <a:txBody>
-                    <a:bodyPr/>
+                    <a:bodyPr lIns="73152" rIns="73152" tIns="73152" bIns="73152" wrap="square"/>
                     <a:lstStyle/>
                     <a:p>
                       <a:pPr algn="l">
@@ -5461,16 +5377,11 @@
                     </a:solidFill>
                   </a:tcPr>
                 </a:tc>
-                <a:extLst>
-                  <a:ext uri="{0D108BD9-81ED-4DB2-BD59-A6C34878D82A}">
-                    <a16:rowId xmlns:a16="http://schemas.microsoft.com/office/drawing/2014/main" val="10004"/>
-                  </a:ext>
-                </a:extLst>
               </a:tr>
               <a:tr h="587828">
                 <a:tc>
                   <a:txBody>
-                    <a:bodyPr/>
+                    <a:bodyPr lIns="73152" rIns="73152" tIns="73152" bIns="73152" wrap="square"/>
                     <a:lstStyle/>
                     <a:p>
                       <a:pPr algn="l">
@@ -5494,7 +5405,7 @@
                 </a:tc>
                 <a:tc>
                   <a:txBody>
-                    <a:bodyPr/>
+                    <a:bodyPr lIns="73152" rIns="73152" tIns="73152" bIns="73152" wrap="square"/>
                     <a:lstStyle/>
                     <a:p>
                       <a:pPr algn="l">
@@ -5516,16 +5427,11 @@
                     </a:solidFill>
                   </a:tcPr>
                 </a:tc>
-                <a:extLst>
-                  <a:ext uri="{0D108BD9-81ED-4DB2-BD59-A6C34878D82A}">
-                    <a16:rowId xmlns:a16="http://schemas.microsoft.com/office/drawing/2014/main" val="10005"/>
-                  </a:ext>
-                </a:extLst>
               </a:tr>
               <a:tr h="587832">
                 <a:tc>
                   <a:txBody>
-                    <a:bodyPr/>
+                    <a:bodyPr lIns="73152" rIns="73152" tIns="73152" bIns="73152" wrap="square"/>
                     <a:lstStyle/>
                     <a:p>
                       <a:pPr algn="l">
@@ -5549,7 +5455,7 @@
                 </a:tc>
                 <a:tc>
                   <a:txBody>
-                    <a:bodyPr/>
+                    <a:bodyPr lIns="73152" rIns="73152" tIns="73152" bIns="73152" wrap="square"/>
                     <a:lstStyle/>
                     <a:p>
                       <a:pPr algn="l">
@@ -5571,11 +5477,6 @@
                     </a:solidFill>
                   </a:tcPr>
                 </a:tc>
-                <a:extLst>
-                  <a:ext uri="{0D108BD9-81ED-4DB2-BD59-A6C34878D82A}">
-                    <a16:rowId xmlns:a16="http://schemas.microsoft.com/office/drawing/2014/main" val="10006"/>
-                  </a:ext>
-                </a:extLst>
               </a:tr>
             </a:tbl>
           </a:graphicData>
@@ -5590,7 +5491,7 @@
 </file>
 
 <file path=ppt/slides/slide13.xml><?xml version="1.0" encoding="utf-8"?>
-<p:sld xmlns:a="http://schemas.openxmlformats.org/drawingml/2006/main" xmlns:r="http://schemas.openxmlformats.org/officeDocument/2006/relationships" xmlns:p="http://schemas.openxmlformats.org/presentationml/2006/main">
+<p:sld xmlns:a="http://schemas.openxmlformats.org/drawingml/2006/main" xmlns:p="http://schemas.openxmlformats.org/presentationml/2006/main" xmlns:r="http://schemas.openxmlformats.org/officeDocument/2006/relationships">
   <p:cSld>
     <p:spTree>
       <p:nvGrpSpPr>
@@ -5598,14 +5499,7 @@
         <p:cNvGrpSpPr/>
         <p:nvPr/>
       </p:nvGrpSpPr>
-      <p:grpSpPr>
-        <a:xfrm>
-          <a:off x="0" y="0"/>
-          <a:ext cx="0" cy="0"/>
-          <a:chOff x="0" y="0"/>
-          <a:chExt cx="0" cy="0"/>
-        </a:xfrm>
-      </p:grpSpPr>
+      <p:grpSpPr/>
       <p:sp>
         <p:nvSpPr>
           <p:cNvPr id="2" name="Rectangle 1"/>
@@ -5646,7 +5540,6 @@
           <a:lstStyle/>
           <a:p>
             <a:pPr algn="ctr"/>
-            <a:endParaRPr/>
           </a:p>
         </p:txBody>
       </p:sp>
@@ -5667,7 +5560,7 @@
           <a:noFill/>
         </p:spPr>
         <p:txBody>
-          <a:bodyPr wrap="square" lIns="0" tIns="0" rIns="0" bIns="0">
+          <a:bodyPr wrap="square" lIns="0" tIns="0" bIns="0" rIns="0">
             <a:spAutoFit/>
           </a:bodyPr>
           <a:lstStyle/>
@@ -5705,25 +5598,13 @@
                 <a:tableStyleId>{5C22544A-7EE6-4342-B048-85BDC9FD1C3A}</a:tableStyleId>
               </a:tblPr>
               <a:tblGrid>
-                <a:gridCol w="2743200">
-                  <a:extLst>
-                    <a:ext uri="{9D8B030D-6E8A-4147-A177-3AD203B41FA5}">
-                      <a16:colId xmlns:a16="http://schemas.microsoft.com/office/drawing/2014/main" val="20000"/>
-                    </a:ext>
-                  </a:extLst>
-                </a:gridCol>
-                <a:gridCol w="7985455">
-                  <a:extLst>
-                    <a:ext uri="{9D8B030D-6E8A-4147-A177-3AD203B41FA5}">
-                      <a16:colId xmlns:a16="http://schemas.microsoft.com/office/drawing/2014/main" val="20001"/>
-                    </a:ext>
-                  </a:extLst>
-                </a:gridCol>
+                <a:gridCol w="2743200"/>
+                <a:gridCol w="7985455"/>
               </a:tblGrid>
               <a:tr h="587828">
                 <a:tc>
                   <a:txBody>
-                    <a:bodyPr/>
+                    <a:bodyPr lIns="73152" rIns="73152" tIns="73152" bIns="73152" wrap="square"/>
                     <a:lstStyle/>
                     <a:p>
                       <a:pPr algn="l">
@@ -5747,7 +5628,7 @@
                 </a:tc>
                 <a:tc>
                   <a:txBody>
-                    <a:bodyPr/>
+                    <a:bodyPr lIns="73152" rIns="73152" tIns="73152" bIns="73152" wrap="square"/>
                     <a:lstStyle/>
                     <a:p>
                       <a:pPr algn="l">
@@ -5769,16 +5650,11 @@
                     </a:solidFill>
                   </a:tcPr>
                 </a:tc>
-                <a:extLst>
-                  <a:ext uri="{0D108BD9-81ED-4DB2-BD59-A6C34878D82A}">
-                    <a16:rowId xmlns:a16="http://schemas.microsoft.com/office/drawing/2014/main" val="10000"/>
-                  </a:ext>
-                </a:extLst>
               </a:tr>
               <a:tr h="587828">
                 <a:tc>
                   <a:txBody>
-                    <a:bodyPr/>
+                    <a:bodyPr lIns="73152" rIns="73152" tIns="73152" bIns="73152" wrap="square"/>
                     <a:lstStyle/>
                     <a:p>
                       <a:pPr algn="l">
@@ -5802,7 +5678,7 @@
                 </a:tc>
                 <a:tc>
                   <a:txBody>
-                    <a:bodyPr/>
+                    <a:bodyPr lIns="73152" rIns="73152" tIns="73152" bIns="73152" wrap="square"/>
                     <a:lstStyle/>
                     <a:p>
                       <a:pPr algn="l">
@@ -5824,16 +5700,11 @@
                     </a:solidFill>
                   </a:tcPr>
                 </a:tc>
-                <a:extLst>
-                  <a:ext uri="{0D108BD9-81ED-4DB2-BD59-A6C34878D82A}">
-                    <a16:rowId xmlns:a16="http://schemas.microsoft.com/office/drawing/2014/main" val="10001"/>
-                  </a:ext>
-                </a:extLst>
               </a:tr>
               <a:tr h="587828">
                 <a:tc>
                   <a:txBody>
-                    <a:bodyPr/>
+                    <a:bodyPr lIns="73152" rIns="73152" tIns="73152" bIns="73152" wrap="square"/>
                     <a:lstStyle/>
                     <a:p>
                       <a:pPr algn="l">
@@ -5857,7 +5728,7 @@
                 </a:tc>
                 <a:tc>
                   <a:txBody>
-                    <a:bodyPr/>
+                    <a:bodyPr lIns="73152" rIns="73152" tIns="73152" bIns="73152" wrap="square"/>
                     <a:lstStyle/>
                     <a:p>
                       <a:pPr algn="l">
@@ -5879,16 +5750,11 @@
                     </a:solidFill>
                   </a:tcPr>
                 </a:tc>
-                <a:extLst>
-                  <a:ext uri="{0D108BD9-81ED-4DB2-BD59-A6C34878D82A}">
-                    <a16:rowId xmlns:a16="http://schemas.microsoft.com/office/drawing/2014/main" val="10002"/>
-                  </a:ext>
-                </a:extLst>
               </a:tr>
               <a:tr h="587828">
                 <a:tc>
                   <a:txBody>
-                    <a:bodyPr/>
+                    <a:bodyPr lIns="73152" rIns="73152" tIns="73152" bIns="73152" wrap="square"/>
                     <a:lstStyle/>
                     <a:p>
                       <a:pPr algn="l">
@@ -5912,7 +5778,7 @@
                 </a:tc>
                 <a:tc>
                   <a:txBody>
-                    <a:bodyPr/>
+                    <a:bodyPr lIns="73152" rIns="73152" tIns="73152" bIns="73152" wrap="square"/>
                     <a:lstStyle/>
                     <a:p>
                       <a:pPr algn="l">
@@ -5934,16 +5800,11 @@
                     </a:solidFill>
                   </a:tcPr>
                 </a:tc>
-                <a:extLst>
-                  <a:ext uri="{0D108BD9-81ED-4DB2-BD59-A6C34878D82A}">
-                    <a16:rowId xmlns:a16="http://schemas.microsoft.com/office/drawing/2014/main" val="10003"/>
-                  </a:ext>
-                </a:extLst>
               </a:tr>
               <a:tr h="587828">
                 <a:tc>
                   <a:txBody>
-                    <a:bodyPr/>
+                    <a:bodyPr lIns="73152" rIns="73152" tIns="73152" bIns="73152" wrap="square"/>
                     <a:lstStyle/>
                     <a:p>
                       <a:pPr algn="l">
@@ -5967,7 +5828,7 @@
                 </a:tc>
                 <a:tc>
                   <a:txBody>
-                    <a:bodyPr/>
+                    <a:bodyPr lIns="73152" rIns="73152" tIns="73152" bIns="73152" wrap="square"/>
                     <a:lstStyle/>
                     <a:p>
                       <a:pPr algn="l">
@@ -5989,16 +5850,11 @@
                     </a:solidFill>
                   </a:tcPr>
                 </a:tc>
-                <a:extLst>
-                  <a:ext uri="{0D108BD9-81ED-4DB2-BD59-A6C34878D82A}">
-                    <a16:rowId xmlns:a16="http://schemas.microsoft.com/office/drawing/2014/main" val="10004"/>
-                  </a:ext>
-                </a:extLst>
               </a:tr>
               <a:tr h="587828">
                 <a:tc>
                   <a:txBody>
-                    <a:bodyPr/>
+                    <a:bodyPr lIns="73152" rIns="73152" tIns="73152" bIns="73152" wrap="square"/>
                     <a:lstStyle/>
                     <a:p>
                       <a:pPr algn="l">
@@ -6022,7 +5878,7 @@
                 </a:tc>
                 <a:tc>
                   <a:txBody>
-                    <a:bodyPr/>
+                    <a:bodyPr lIns="73152" rIns="73152" tIns="73152" bIns="73152" wrap="square"/>
                     <a:lstStyle/>
                     <a:p>
                       <a:pPr algn="l">
@@ -6044,16 +5900,11 @@
                     </a:solidFill>
                   </a:tcPr>
                 </a:tc>
-                <a:extLst>
-                  <a:ext uri="{0D108BD9-81ED-4DB2-BD59-A6C34878D82A}">
-                    <a16:rowId xmlns:a16="http://schemas.microsoft.com/office/drawing/2014/main" val="10005"/>
-                  </a:ext>
-                </a:extLst>
               </a:tr>
               <a:tr h="587832">
                 <a:tc>
                   <a:txBody>
-                    <a:bodyPr/>
+                    <a:bodyPr lIns="73152" rIns="73152" tIns="73152" bIns="73152" wrap="square"/>
                     <a:lstStyle/>
                     <a:p>
                       <a:pPr algn="l">
@@ -6077,7 +5928,7 @@
                 </a:tc>
                 <a:tc>
                   <a:txBody>
-                    <a:bodyPr/>
+                    <a:bodyPr lIns="73152" rIns="73152" tIns="73152" bIns="73152" wrap="square"/>
                     <a:lstStyle/>
                     <a:p>
                       <a:pPr algn="l">
@@ -6099,11 +5950,6 @@
                     </a:solidFill>
                   </a:tcPr>
                 </a:tc>
-                <a:extLst>
-                  <a:ext uri="{0D108BD9-81ED-4DB2-BD59-A6C34878D82A}">
-                    <a16:rowId xmlns:a16="http://schemas.microsoft.com/office/drawing/2014/main" val="10006"/>
-                  </a:ext>
-                </a:extLst>
               </a:tr>
             </a:tbl>
           </a:graphicData>
@@ -6118,7 +5964,7 @@
 </file>
 
 <file path=ppt/slides/slide14.xml><?xml version="1.0" encoding="utf-8"?>
-<p:sld xmlns:a="http://schemas.openxmlformats.org/drawingml/2006/main" xmlns:r="http://schemas.openxmlformats.org/officeDocument/2006/relationships" xmlns:p="http://schemas.openxmlformats.org/presentationml/2006/main">
+<p:sld xmlns:a="http://schemas.openxmlformats.org/drawingml/2006/main" xmlns:p="http://schemas.openxmlformats.org/presentationml/2006/main" xmlns:r="http://schemas.openxmlformats.org/officeDocument/2006/relationships">
   <p:cSld>
     <p:spTree>
       <p:nvGrpSpPr>
@@ -6126,14 +5972,7 @@
         <p:cNvGrpSpPr/>
         <p:nvPr/>
       </p:nvGrpSpPr>
-      <p:grpSpPr>
-        <a:xfrm>
-          <a:off x="0" y="0"/>
-          <a:ext cx="0" cy="0"/>
-          <a:chOff x="0" y="0"/>
-          <a:chExt cx="0" cy="0"/>
-        </a:xfrm>
-      </p:grpSpPr>
+      <p:grpSpPr/>
       <p:sp>
         <p:nvSpPr>
           <p:cNvPr id="2" name="Rectangle 1"/>
@@ -6174,7 +6013,6 @@
           <a:lstStyle/>
           <a:p>
             <a:pPr algn="ctr"/>
-            <a:endParaRPr/>
           </a:p>
         </p:txBody>
       </p:sp>
@@ -6195,7 +6033,7 @@
           <a:noFill/>
         </p:spPr>
         <p:txBody>
-          <a:bodyPr wrap="square" lIns="0" tIns="0" rIns="0" bIns="0">
+          <a:bodyPr wrap="square" lIns="0" tIns="0" bIns="0" rIns="0">
             <a:spAutoFit/>
           </a:bodyPr>
           <a:lstStyle/>
@@ -6237,7 +6075,7 @@
           <a:lstStyle/>
           <a:p>
             <a:pPr>
-              <a:defRPr sz="1300" b="1">
+              <a:defRPr b="1" sz="1300">
                 <a:solidFill>
                   <a:srgbClr val="0F2D59"/>
                 </a:solidFill>
@@ -6287,7 +6125,7 @@
           </a:fontRef>
         </p:style>
         <p:txBody>
-          <a:bodyPr wrap="square" lIns="45720" rIns="45720" rtlCol="0" anchor="ctr"/>
+          <a:bodyPr rtlCol="0" anchor="ctr" wrap="square" lIns="45720" rIns="45720"/>
           <a:lstStyle/>
           <a:p>
             <a:pPr algn="ctr">
@@ -6348,7 +6186,6 @@
           <a:lstStyle/>
           <a:p>
             <a:pPr algn="ctr"/>
-            <a:endParaRPr/>
           </a:p>
         </p:txBody>
       </p:sp>
@@ -6369,7 +6206,7 @@
           <a:noFill/>
         </p:spPr>
         <p:txBody>
-          <a:bodyPr wrap="square" lIns="0" tIns="0" rIns="0" bIns="0">
+          <a:bodyPr wrap="square" lIns="0" tIns="0" bIns="0" rIns="0">
             <a:spAutoFit/>
           </a:bodyPr>
           <a:lstStyle/>
@@ -6426,7 +6263,7 @@
           </a:fontRef>
         </p:style>
         <p:txBody>
-          <a:bodyPr wrap="square" lIns="45720" rIns="45720" rtlCol="0" anchor="ctr"/>
+          <a:bodyPr rtlCol="0" anchor="ctr" wrap="square" lIns="45720" rIns="45720"/>
           <a:lstStyle/>
           <a:p>
             <a:pPr algn="ctr">
@@ -6491,7 +6328,6 @@
           <a:lstStyle/>
           <a:p>
             <a:pPr algn="ctr"/>
-            <a:endParaRPr/>
           </a:p>
         </p:txBody>
       </p:sp>
@@ -6512,7 +6348,7 @@
           <a:noFill/>
         </p:spPr>
         <p:txBody>
-          <a:bodyPr wrap="square" lIns="0" tIns="0" rIns="0" bIns="0">
+          <a:bodyPr wrap="square" lIns="0" tIns="0" bIns="0" rIns="0">
             <a:spAutoFit/>
           </a:bodyPr>
           <a:lstStyle/>
@@ -6569,7 +6405,7 @@
           </a:fontRef>
         </p:style>
         <p:txBody>
-          <a:bodyPr wrap="square" lIns="45720" rIns="45720" rtlCol="0" anchor="ctr"/>
+          <a:bodyPr rtlCol="0" anchor="ctr" wrap="square" lIns="45720" rIns="45720"/>
           <a:lstStyle/>
           <a:p>
             <a:pPr algn="ctr">
@@ -6648,7 +6484,7 @@
           <a:lstStyle/>
           <a:p>
             <a:pPr>
-              <a:defRPr sz="1300" b="1">
+              <a:defRPr b="1" sz="1300">
                 <a:solidFill>
                   <a:srgbClr val="0F2D59"/>
                 </a:solidFill>
@@ -6698,7 +6534,7 @@
           </a:fontRef>
         </p:style>
         <p:txBody>
-          <a:bodyPr wrap="square" lIns="45720" rIns="45720" rtlCol="0" anchor="ctr"/>
+          <a:bodyPr rtlCol="0" anchor="ctr" wrap="square" lIns="45720" rIns="45720"/>
           <a:lstStyle/>
           <a:p>
             <a:pPr algn="ctr">
@@ -6763,7 +6599,6 @@
           <a:lstStyle/>
           <a:p>
             <a:pPr algn="ctr"/>
-            <a:endParaRPr/>
           </a:p>
         </p:txBody>
       </p:sp>
@@ -6784,7 +6619,7 @@
           <a:noFill/>
         </p:spPr>
         <p:txBody>
-          <a:bodyPr wrap="square" lIns="0" tIns="0" rIns="0" bIns="0">
+          <a:bodyPr wrap="square" lIns="0" tIns="0" bIns="0" rIns="0">
             <a:spAutoFit/>
           </a:bodyPr>
           <a:lstStyle/>
@@ -6841,7 +6676,7 @@
           </a:fontRef>
         </p:style>
         <p:txBody>
-          <a:bodyPr wrap="square" lIns="45720" rIns="45720" rtlCol="0" anchor="ctr"/>
+          <a:bodyPr rtlCol="0" anchor="ctr" wrap="square" lIns="45720" rIns="45720"/>
           <a:lstStyle/>
           <a:p>
             <a:pPr algn="ctr">
@@ -6906,7 +6741,6 @@
           <a:lstStyle/>
           <a:p>
             <a:pPr algn="ctr"/>
-            <a:endParaRPr/>
           </a:p>
         </p:txBody>
       </p:sp>
@@ -6927,7 +6761,7 @@
           <a:noFill/>
         </p:spPr>
         <p:txBody>
-          <a:bodyPr wrap="square" lIns="0" tIns="0" rIns="0" bIns="0">
+          <a:bodyPr wrap="square" lIns="0" tIns="0" bIns="0" rIns="0">
             <a:spAutoFit/>
           </a:bodyPr>
           <a:lstStyle/>
@@ -6984,7 +6818,7 @@
           </a:fontRef>
         </p:style>
         <p:txBody>
-          <a:bodyPr wrap="square" lIns="45720" rIns="45720" rtlCol="0" anchor="ctr"/>
+          <a:bodyPr rtlCol="0" anchor="ctr" wrap="square" lIns="45720" rIns="45720"/>
           <a:lstStyle/>
           <a:p>
             <a:pPr algn="ctr">
@@ -7049,7 +6883,6 @@
           <a:lstStyle/>
           <a:p>
             <a:pPr algn="ctr"/>
-            <a:endParaRPr/>
           </a:p>
         </p:txBody>
       </p:sp>
@@ -7070,7 +6903,7 @@
           <a:noFill/>
         </p:spPr>
         <p:txBody>
-          <a:bodyPr wrap="square" lIns="0" tIns="0" rIns="0" bIns="0">
+          <a:bodyPr wrap="square" lIns="0" tIns="0" bIns="0" rIns="0">
             <a:spAutoFit/>
           </a:bodyPr>
           <a:lstStyle/>
@@ -7127,7 +6960,7 @@
           </a:fontRef>
         </p:style>
         <p:txBody>
-          <a:bodyPr wrap="square" lIns="45720" rIns="45720" rtlCol="0" anchor="ctr"/>
+          <a:bodyPr rtlCol="0" anchor="ctr" wrap="square" lIns="45720" rIns="45720"/>
           <a:lstStyle/>
           <a:p>
             <a:pPr algn="ctr">
@@ -7190,7 +7023,7 @@
           </a:fontRef>
         </p:style>
         <p:txBody>
-          <a:bodyPr wrap="square" lIns="45720" rIns="45720" rtlCol="0" anchor="ctr"/>
+          <a:bodyPr rtlCol="0" anchor="ctr" wrap="square" lIns="45720" rIns="45720"/>
           <a:lstStyle/>
           <a:p>
             <a:pPr algn="ctr">
@@ -7247,7 +7080,6 @@
           <a:lstStyle/>
           <a:p>
             <a:pPr algn="ctr"/>
-            <a:endParaRPr/>
           </a:p>
         </p:txBody>
       </p:sp>
@@ -7268,7 +7100,7 @@
           <a:noFill/>
         </p:spPr>
         <p:txBody>
-          <a:bodyPr wrap="square" lIns="0" tIns="0" rIns="0" bIns="0">
+          <a:bodyPr wrap="square" lIns="0" tIns="0" bIns="0" rIns="0">
             <a:spAutoFit/>
           </a:bodyPr>
           <a:lstStyle/>
@@ -7296,7 +7128,7 @@
 </file>
 
 <file path=ppt/slides/slide15.xml><?xml version="1.0" encoding="utf-8"?>
-<p:sld xmlns:a="http://schemas.openxmlformats.org/drawingml/2006/main" xmlns:r="http://schemas.openxmlformats.org/officeDocument/2006/relationships" xmlns:p="http://schemas.openxmlformats.org/presentationml/2006/main">
+<p:sld xmlns:a="http://schemas.openxmlformats.org/drawingml/2006/main" xmlns:p="http://schemas.openxmlformats.org/presentationml/2006/main" xmlns:r="http://schemas.openxmlformats.org/officeDocument/2006/relationships">
   <p:cSld>
     <p:spTree>
       <p:nvGrpSpPr>
@@ -7304,14 +7136,7 @@
         <p:cNvGrpSpPr/>
         <p:nvPr/>
       </p:nvGrpSpPr>
-      <p:grpSpPr>
-        <a:xfrm>
-          <a:off x="0" y="0"/>
-          <a:ext cx="0" cy="0"/>
-          <a:chOff x="0" y="0"/>
-          <a:chExt cx="0" cy="0"/>
-        </a:xfrm>
-      </p:grpSpPr>
+      <p:grpSpPr/>
       <p:sp>
         <p:nvSpPr>
           <p:cNvPr id="2" name="Rectangle 1"/>
@@ -7352,7 +7177,6 @@
           <a:lstStyle/>
           <a:p>
             <a:pPr algn="ctr"/>
-            <a:endParaRPr/>
           </a:p>
         </p:txBody>
       </p:sp>
@@ -7373,7 +7197,7 @@
           <a:noFill/>
         </p:spPr>
         <p:txBody>
-          <a:bodyPr wrap="square" lIns="0" tIns="0" rIns="0" bIns="0">
+          <a:bodyPr wrap="square" lIns="0" tIns="0" bIns="0" rIns="0">
             <a:spAutoFit/>
           </a:bodyPr>
           <a:lstStyle/>
@@ -7430,7 +7254,7 @@
           </a:fontRef>
         </p:style>
         <p:txBody>
-          <a:bodyPr wrap="square" lIns="45720" rIns="45720" rtlCol="0" anchor="ctr"/>
+          <a:bodyPr rtlCol="0" anchor="ctr" wrap="square" lIns="45720" rIns="45720"/>
           <a:lstStyle/>
           <a:p>
             <a:pPr algn="ctr">
@@ -7489,7 +7313,7 @@
           </a:fontRef>
         </p:style>
         <p:txBody>
-          <a:bodyPr wrap="square" lIns="45720" rIns="45720" rtlCol="0" anchor="ctr"/>
+          <a:bodyPr rtlCol="0" anchor="ctr" wrap="square" lIns="45720" rIns="45720"/>
           <a:lstStyle/>
           <a:p>
             <a:pPr algn="ctr">
@@ -7544,7 +7368,7 @@
           </a:fontRef>
         </p:style>
         <p:txBody>
-          <a:bodyPr wrap="square" lIns="45720" rIns="45720" rtlCol="0" anchor="ctr"/>
+          <a:bodyPr rtlCol="0" anchor="ctr" wrap="square" lIns="45720" rIns="45720"/>
           <a:lstStyle/>
           <a:p>
             <a:pPr algn="ctr">
@@ -7599,7 +7423,7 @@
           </a:fontRef>
         </p:style>
         <p:txBody>
-          <a:bodyPr wrap="square" lIns="45720" rIns="45720" rtlCol="0" anchor="ctr"/>
+          <a:bodyPr rtlCol="0" anchor="ctr" wrap="square" lIns="45720" rIns="45720"/>
           <a:lstStyle/>
           <a:p>
             <a:pPr algn="ctr">
@@ -7654,7 +7478,7 @@
           </a:fontRef>
         </p:style>
         <p:txBody>
-          <a:bodyPr wrap="square" lIns="45720" rIns="45720" rtlCol="0" anchor="ctr"/>
+          <a:bodyPr rtlCol="0" anchor="ctr" wrap="square" lIns="45720" rIns="45720"/>
           <a:lstStyle/>
           <a:p>
             <a:pPr algn="ctr">
@@ -7709,7 +7533,7 @@
           </a:fontRef>
         </p:style>
         <p:txBody>
-          <a:bodyPr wrap="square" lIns="45720" rIns="45720" rtlCol="0" anchor="ctr"/>
+          <a:bodyPr rtlCol="0" anchor="ctr" wrap="square" lIns="45720" rIns="45720"/>
           <a:lstStyle/>
           <a:p>
             <a:pPr algn="ctr">
@@ -7764,7 +7588,7 @@
           </a:fontRef>
         </p:style>
         <p:txBody>
-          <a:bodyPr wrap="square" lIns="45720" rIns="45720" rtlCol="0" anchor="ctr"/>
+          <a:bodyPr rtlCol="0" anchor="ctr" wrap="square" lIns="45720" rIns="45720"/>
           <a:lstStyle/>
           <a:p>
             <a:pPr algn="ctr">
@@ -7969,7 +7793,7 @@
 </file>
 
 <file path=ppt/slides/slide16.xml><?xml version="1.0" encoding="utf-8"?>
-<p:sld xmlns:a="http://schemas.openxmlformats.org/drawingml/2006/main" xmlns:r="http://schemas.openxmlformats.org/officeDocument/2006/relationships" xmlns:p="http://schemas.openxmlformats.org/presentationml/2006/main">
+<p:sld xmlns:a="http://schemas.openxmlformats.org/drawingml/2006/main" xmlns:p="http://schemas.openxmlformats.org/presentationml/2006/main" xmlns:r="http://schemas.openxmlformats.org/officeDocument/2006/relationships">
   <p:cSld>
     <p:spTree>
       <p:nvGrpSpPr>
@@ -7977,14 +7801,7 @@
         <p:cNvGrpSpPr/>
         <p:nvPr/>
       </p:nvGrpSpPr>
-      <p:grpSpPr>
-        <a:xfrm>
-          <a:off x="0" y="0"/>
-          <a:ext cx="0" cy="0"/>
-          <a:chOff x="0" y="0"/>
-          <a:chExt cx="0" cy="0"/>
-        </a:xfrm>
-      </p:grpSpPr>
+      <p:grpSpPr/>
       <p:sp>
         <p:nvSpPr>
           <p:cNvPr id="2" name="Rectangle 1"/>
@@ -8025,7 +7842,6 @@
           <a:lstStyle/>
           <a:p>
             <a:pPr algn="ctr"/>
-            <a:endParaRPr/>
           </a:p>
         </p:txBody>
       </p:sp>
@@ -8046,7 +7862,7 @@
           <a:noFill/>
         </p:spPr>
         <p:txBody>
-          <a:bodyPr wrap="square" lIns="0" tIns="0" rIns="0" bIns="0">
+          <a:bodyPr wrap="square" lIns="0" tIns="0" bIns="0" rIns="0">
             <a:spAutoFit/>
           </a:bodyPr>
           <a:lstStyle/>
@@ -8103,7 +7919,7 @@
           </a:fontRef>
         </p:style>
         <p:txBody>
-          <a:bodyPr wrap="square" lIns="45720" rIns="45720" rtlCol="0" anchor="ctr"/>
+          <a:bodyPr rtlCol="0" anchor="ctr" wrap="square" lIns="45720" rIns="45720"/>
           <a:lstStyle/>
           <a:p>
             <a:pPr algn="ctr">
@@ -8193,7 +8009,7 @@
           </a:fontRef>
         </p:style>
         <p:txBody>
-          <a:bodyPr wrap="square" lIns="45720" rIns="45720" rtlCol="0" anchor="ctr"/>
+          <a:bodyPr rtlCol="0" anchor="ctr" wrap="square" lIns="45720" rIns="45720"/>
           <a:lstStyle/>
           <a:p>
             <a:pPr algn="ctr">
@@ -8283,7 +8099,7 @@
           </a:fontRef>
         </p:style>
         <p:txBody>
-          <a:bodyPr wrap="square" lIns="45720" rIns="45720" rtlCol="0" anchor="ctr"/>
+          <a:bodyPr rtlCol="0" anchor="ctr" wrap="square" lIns="45720" rIns="45720"/>
           <a:lstStyle/>
           <a:p>
             <a:pPr algn="ctr">
@@ -8373,7 +8189,7 @@
           </a:fontRef>
         </p:style>
         <p:txBody>
-          <a:bodyPr wrap="square" lIns="45720" rIns="45720" rtlCol="0" anchor="ctr"/>
+          <a:bodyPr rtlCol="0" anchor="ctr" wrap="square" lIns="45720" rIns="45720"/>
           <a:lstStyle/>
           <a:p>
             <a:pPr algn="ctr">
@@ -8463,7 +8279,7 @@
           </a:fontRef>
         </p:style>
         <p:txBody>
-          <a:bodyPr wrap="square" lIns="45720" rIns="45720" rtlCol="0" anchor="ctr"/>
+          <a:bodyPr rtlCol="0" anchor="ctr" wrap="square" lIns="45720" rIns="45720"/>
           <a:lstStyle/>
           <a:p>
             <a:pPr algn="ctr">
@@ -8553,7 +8369,7 @@
           </a:fontRef>
         </p:style>
         <p:txBody>
-          <a:bodyPr wrap="square" lIns="45720" rIns="45720" rtlCol="0" anchor="ctr"/>
+          <a:bodyPr rtlCol="0" anchor="ctr" wrap="square" lIns="45720" rIns="45720"/>
           <a:lstStyle/>
           <a:p>
             <a:pPr algn="ctr">
@@ -8645,7 +8461,6 @@
           <a:lstStyle/>
           <a:p>
             <a:pPr algn="ctr"/>
-            <a:endParaRPr/>
           </a:p>
         </p:txBody>
       </p:sp>
@@ -8666,7 +8481,7 @@
           <a:noFill/>
         </p:spPr>
         <p:txBody>
-          <a:bodyPr wrap="square" lIns="0" tIns="0" rIns="0" bIns="0">
+          <a:bodyPr wrap="square" lIns="0" tIns="0" bIns="0" rIns="0">
             <a:spAutoFit/>
           </a:bodyPr>
           <a:lstStyle/>
@@ -8725,7 +8540,6 @@
           <a:lstStyle/>
           <a:p>
             <a:pPr algn="ctr"/>
-            <a:endParaRPr/>
           </a:p>
         </p:txBody>
       </p:sp>
@@ -8746,7 +8560,7 @@
           <a:noFill/>
         </p:spPr>
         <p:txBody>
-          <a:bodyPr wrap="square" lIns="0" tIns="0" rIns="0" bIns="0">
+          <a:bodyPr wrap="square" lIns="0" tIns="0" bIns="0" rIns="0">
             <a:spAutoFit/>
           </a:bodyPr>
           <a:lstStyle/>
@@ -8805,7 +8619,6 @@
           <a:lstStyle/>
           <a:p>
             <a:pPr algn="ctr"/>
-            <a:endParaRPr/>
           </a:p>
         </p:txBody>
       </p:sp>
@@ -8826,7 +8639,7 @@
           <a:noFill/>
         </p:spPr>
         <p:txBody>
-          <a:bodyPr wrap="square" lIns="0" tIns="0" rIns="0" bIns="0">
+          <a:bodyPr wrap="square" lIns="0" tIns="0" bIns="0" rIns="0">
             <a:spAutoFit/>
           </a:bodyPr>
           <a:lstStyle/>
@@ -8885,7 +8698,6 @@
           <a:lstStyle/>
           <a:p>
             <a:pPr algn="ctr"/>
-            <a:endParaRPr/>
           </a:p>
         </p:txBody>
       </p:sp>
@@ -8906,7 +8718,7 @@
           <a:noFill/>
         </p:spPr>
         <p:txBody>
-          <a:bodyPr wrap="square" lIns="0" tIns="0" rIns="0" bIns="0">
+          <a:bodyPr wrap="square" lIns="0" tIns="0" bIns="0" rIns="0">
             <a:spAutoFit/>
           </a:bodyPr>
           <a:lstStyle/>
@@ -8965,7 +8777,6 @@
           <a:lstStyle/>
           <a:p>
             <a:pPr algn="ctr"/>
-            <a:endParaRPr/>
           </a:p>
         </p:txBody>
       </p:sp>
@@ -8986,7 +8797,7 @@
           <a:noFill/>
         </p:spPr>
         <p:txBody>
-          <a:bodyPr wrap="square" lIns="0" tIns="0" rIns="0" bIns="0">
+          <a:bodyPr wrap="square" lIns="0" tIns="0" bIns="0" rIns="0">
             <a:spAutoFit/>
           </a:bodyPr>
           <a:lstStyle/>
@@ -9045,7 +8856,6 @@
           <a:lstStyle/>
           <a:p>
             <a:pPr algn="ctr"/>
-            <a:endParaRPr/>
           </a:p>
         </p:txBody>
       </p:sp>
@@ -9066,7 +8876,7 @@
           <a:noFill/>
         </p:spPr>
         <p:txBody>
-          <a:bodyPr wrap="square" lIns="0" tIns="0" rIns="0" bIns="0">
+          <a:bodyPr wrap="square" lIns="0" tIns="0" bIns="0" rIns="0">
             <a:spAutoFit/>
           </a:bodyPr>
           <a:lstStyle/>
@@ -9094,7 +8904,7 @@
 </file>
 
 <file path=ppt/slides/slide17.xml><?xml version="1.0" encoding="utf-8"?>
-<p:sld xmlns:a="http://schemas.openxmlformats.org/drawingml/2006/main" xmlns:r="http://schemas.openxmlformats.org/officeDocument/2006/relationships" xmlns:p="http://schemas.openxmlformats.org/presentationml/2006/main">
+<p:sld xmlns:a="http://schemas.openxmlformats.org/drawingml/2006/main" xmlns:p="http://schemas.openxmlformats.org/presentationml/2006/main" xmlns:r="http://schemas.openxmlformats.org/officeDocument/2006/relationships">
   <p:cSld>
     <p:spTree>
       <p:nvGrpSpPr>
@@ -9102,14 +8912,7 @@
         <p:cNvGrpSpPr/>
         <p:nvPr/>
       </p:nvGrpSpPr>
-      <p:grpSpPr>
-        <a:xfrm>
-          <a:off x="0" y="0"/>
-          <a:ext cx="0" cy="0"/>
-          <a:chOff x="0" y="0"/>
-          <a:chExt cx="0" cy="0"/>
-        </a:xfrm>
-      </p:grpSpPr>
+      <p:grpSpPr/>
       <p:sp>
         <p:nvSpPr>
           <p:cNvPr id="2" name="Rectangle 1"/>
@@ -9150,7 +8953,6 @@
           <a:lstStyle/>
           <a:p>
             <a:pPr algn="ctr"/>
-            <a:endParaRPr/>
           </a:p>
         </p:txBody>
       </p:sp>
@@ -9171,7 +8973,7 @@
           <a:noFill/>
         </p:spPr>
         <p:txBody>
-          <a:bodyPr wrap="square" lIns="0" tIns="0" rIns="0" bIns="0">
+          <a:bodyPr wrap="square" lIns="0" tIns="0" bIns="0" rIns="0">
             <a:spAutoFit/>
           </a:bodyPr>
           <a:lstStyle/>
@@ -9228,7 +9030,7 @@
           </a:fontRef>
         </p:style>
         <p:txBody>
-          <a:bodyPr wrap="square" lIns="182880" tIns="182880" rIns="182880" bIns="182880" rtlCol="0" anchor="ctr"/>
+          <a:bodyPr rtlCol="0" anchor="ctr" wrap="square" lIns="182880" rIns="182880" tIns="182880" bIns="182880"/>
           <a:lstStyle/>
           <a:p>
             <a:pPr algn="l">
@@ -9290,7 +9092,6 @@
                 <a:latin typeface="Consolas"/>
               </a:defRPr>
             </a:pPr>
-            <a:endParaRPr/>
           </a:p>
           <a:p>
             <a:pPr algn="l">
@@ -9575,7 +9376,7 @@
 </file>
 
 <file path=ppt/slides/slide18.xml><?xml version="1.0" encoding="utf-8"?>
-<p:sld xmlns:a="http://schemas.openxmlformats.org/drawingml/2006/main" xmlns:r="http://schemas.openxmlformats.org/officeDocument/2006/relationships" xmlns:p="http://schemas.openxmlformats.org/presentationml/2006/main">
+<p:sld xmlns:a="http://schemas.openxmlformats.org/drawingml/2006/main" xmlns:p="http://schemas.openxmlformats.org/presentationml/2006/main" xmlns:r="http://schemas.openxmlformats.org/officeDocument/2006/relationships">
   <p:cSld>
     <p:spTree>
       <p:nvGrpSpPr>
@@ -9583,14 +9384,7 @@
         <p:cNvGrpSpPr/>
         <p:nvPr/>
       </p:nvGrpSpPr>
-      <p:grpSpPr>
-        <a:xfrm>
-          <a:off x="0" y="0"/>
-          <a:ext cx="0" cy="0"/>
-          <a:chOff x="0" y="0"/>
-          <a:chExt cx="0" cy="0"/>
-        </a:xfrm>
-      </p:grpSpPr>
+      <p:grpSpPr/>
       <p:sp>
         <p:nvSpPr>
           <p:cNvPr id="2" name="Rectangle 1"/>
@@ -9631,7 +9425,6 @@
           <a:lstStyle/>
           <a:p>
             <a:pPr algn="ctr"/>
-            <a:endParaRPr/>
           </a:p>
         </p:txBody>
       </p:sp>
@@ -9652,7 +9445,7 @@
           <a:noFill/>
         </p:spPr>
         <p:txBody>
-          <a:bodyPr wrap="square" lIns="0" tIns="0" rIns="0" bIns="0">
+          <a:bodyPr wrap="square" lIns="0" tIns="0" bIns="0" rIns="0">
             <a:spAutoFit/>
           </a:bodyPr>
           <a:lstStyle/>
@@ -9709,7 +9502,7 @@
           </a:fontRef>
         </p:style>
         <p:txBody>
-          <a:bodyPr wrap="square" lIns="182880" tIns="182880" rIns="182880" bIns="182880" rtlCol="0" anchor="ctr"/>
+          <a:bodyPr rtlCol="0" anchor="ctr" wrap="square" lIns="182880" rIns="182880" tIns="182880" bIns="182880"/>
           <a:lstStyle/>
           <a:p>
             <a:pPr algn="ctr">
@@ -9826,7 +9619,7 @@
           <a:noFill/>
         </p:spPr>
         <p:txBody>
-          <a:bodyPr wrap="square" lIns="0" tIns="0" rIns="0" bIns="0">
+          <a:bodyPr wrap="square" lIns="0" tIns="0" bIns="0" rIns="0">
             <a:spAutoFit/>
           </a:bodyPr>
           <a:lstStyle/>
@@ -9986,7 +9779,7 @@
 </file>
 
 <file path=ppt/slides/slide19.xml><?xml version="1.0" encoding="utf-8"?>
-<p:sld xmlns:a="http://schemas.openxmlformats.org/drawingml/2006/main" xmlns:r="http://schemas.openxmlformats.org/officeDocument/2006/relationships" xmlns:p="http://schemas.openxmlformats.org/presentationml/2006/main">
+<p:sld xmlns:a="http://schemas.openxmlformats.org/drawingml/2006/main" xmlns:p="http://schemas.openxmlformats.org/presentationml/2006/main" xmlns:r="http://schemas.openxmlformats.org/officeDocument/2006/relationships">
   <p:cSld>
     <p:spTree>
       <p:nvGrpSpPr>
@@ -9994,14 +9787,7 @@
         <p:cNvGrpSpPr/>
         <p:nvPr/>
       </p:nvGrpSpPr>
-      <p:grpSpPr>
-        <a:xfrm>
-          <a:off x="0" y="0"/>
-          <a:ext cx="0" cy="0"/>
-          <a:chOff x="0" y="0"/>
-          <a:chExt cx="0" cy="0"/>
-        </a:xfrm>
-      </p:grpSpPr>
+      <p:grpSpPr/>
       <p:sp>
         <p:nvSpPr>
           <p:cNvPr id="2" name="Rectangle 1"/>
@@ -10042,7 +9828,6 @@
           <a:lstStyle/>
           <a:p>
             <a:pPr algn="ctr"/>
-            <a:endParaRPr/>
           </a:p>
         </p:txBody>
       </p:sp>
@@ -10063,7 +9848,7 @@
           <a:noFill/>
         </p:spPr>
         <p:txBody>
-          <a:bodyPr wrap="square" lIns="0" tIns="0" rIns="0" bIns="0">
+          <a:bodyPr wrap="square" lIns="0" tIns="0" bIns="0" rIns="0">
             <a:spAutoFit/>
           </a:bodyPr>
           <a:lstStyle/>
@@ -10099,7 +9884,7 @@
           <a:noFill/>
         </p:spPr>
         <p:txBody>
-          <a:bodyPr wrap="square" lIns="0" tIns="0" rIns="0" bIns="0">
+          <a:bodyPr wrap="square" lIns="0" tIns="0" bIns="0" rIns="0">
             <a:spAutoFit/>
           </a:bodyPr>
           <a:lstStyle/>
@@ -10259,7 +10044,7 @@
 </file>
 
 <file path=ppt/slides/slide2.xml><?xml version="1.0" encoding="utf-8"?>
-<p:sld xmlns:a="http://schemas.openxmlformats.org/drawingml/2006/main" xmlns:r="http://schemas.openxmlformats.org/officeDocument/2006/relationships" xmlns:p="http://schemas.openxmlformats.org/presentationml/2006/main">
+<p:sld xmlns:a="http://schemas.openxmlformats.org/drawingml/2006/main" xmlns:p="http://schemas.openxmlformats.org/presentationml/2006/main" xmlns:r="http://schemas.openxmlformats.org/officeDocument/2006/relationships">
   <p:cSld>
     <p:spTree>
       <p:nvGrpSpPr>
@@ -10267,14 +10052,7 @@
         <p:cNvGrpSpPr/>
         <p:nvPr/>
       </p:nvGrpSpPr>
-      <p:grpSpPr>
-        <a:xfrm>
-          <a:off x="0" y="0"/>
-          <a:ext cx="0" cy="0"/>
-          <a:chOff x="0" y="0"/>
-          <a:chExt cx="0" cy="0"/>
-        </a:xfrm>
-      </p:grpSpPr>
+      <p:grpSpPr/>
       <p:sp>
         <p:nvSpPr>
           <p:cNvPr id="2" name="Rectangle 1"/>
@@ -10315,7 +10093,6 @@
           <a:lstStyle/>
           <a:p>
             <a:pPr algn="ctr"/>
-            <a:endParaRPr/>
           </a:p>
         </p:txBody>
       </p:sp>
@@ -10336,7 +10113,7 @@
           <a:noFill/>
         </p:spPr>
         <p:txBody>
-          <a:bodyPr wrap="square" lIns="0" tIns="0" rIns="0" bIns="0">
+          <a:bodyPr wrap="square" lIns="0" tIns="0" bIns="0" rIns="0">
             <a:spAutoFit/>
           </a:bodyPr>
           <a:lstStyle/>
@@ -10372,7 +10149,7 @@
           <a:noFill/>
         </p:spPr>
         <p:txBody>
-          <a:bodyPr wrap="square" lIns="0" tIns="0" rIns="0" bIns="0">
+          <a:bodyPr wrap="square" lIns="0" tIns="0" bIns="0" rIns="0">
             <a:spAutoFit/>
           </a:bodyPr>
           <a:lstStyle/>
@@ -10432,7 +10209,7 @@
           </a:fontRef>
         </p:style>
         <p:txBody>
-          <a:bodyPr wrap="square" lIns="182880" tIns="182880" rIns="182880" bIns="182880" rtlCol="0" anchor="ctr"/>
+          <a:bodyPr rtlCol="0" anchor="ctr" wrap="square" lIns="182880" rIns="182880" tIns="182880" bIns="182880"/>
           <a:lstStyle/>
           <a:p>
             <a:pPr algn="ctr">
@@ -10525,7 +10302,7 @@
 </file>
 
 <file path=ppt/slides/slide20.xml><?xml version="1.0" encoding="utf-8"?>
-<p:sld xmlns:a="http://schemas.openxmlformats.org/drawingml/2006/main" xmlns:r="http://schemas.openxmlformats.org/officeDocument/2006/relationships" xmlns:p="http://schemas.openxmlformats.org/presentationml/2006/main">
+<p:sld xmlns:a="http://schemas.openxmlformats.org/drawingml/2006/main" xmlns:p="http://schemas.openxmlformats.org/presentationml/2006/main" xmlns:r="http://schemas.openxmlformats.org/officeDocument/2006/relationships">
   <p:cSld>
     <p:spTree>
       <p:nvGrpSpPr>
@@ -10533,14 +10310,7 @@
         <p:cNvGrpSpPr/>
         <p:nvPr/>
       </p:nvGrpSpPr>
-      <p:grpSpPr>
-        <a:xfrm>
-          <a:off x="0" y="0"/>
-          <a:ext cx="0" cy="0"/>
-          <a:chOff x="0" y="0"/>
-          <a:chExt cx="0" cy="0"/>
-        </a:xfrm>
-      </p:grpSpPr>
+      <p:grpSpPr/>
       <p:sp>
         <p:nvSpPr>
           <p:cNvPr id="2" name="Rectangle 1"/>
@@ -10581,7 +10351,6 @@
           <a:lstStyle/>
           <a:p>
             <a:pPr algn="ctr"/>
-            <a:endParaRPr/>
           </a:p>
         </p:txBody>
       </p:sp>
@@ -10602,7 +10371,7 @@
           <a:noFill/>
         </p:spPr>
         <p:txBody>
-          <a:bodyPr wrap="square" lIns="0" tIns="0" rIns="0" bIns="0">
+          <a:bodyPr wrap="square" lIns="0" tIns="0" bIns="0" rIns="0">
             <a:spAutoFit/>
           </a:bodyPr>
           <a:lstStyle/>
@@ -10638,7 +10407,7 @@
           <a:noFill/>
         </p:spPr>
         <p:txBody>
-          <a:bodyPr wrap="square" lIns="0" tIns="0" rIns="0" bIns="0">
+          <a:bodyPr wrap="square" lIns="0" tIns="0" bIns="0" rIns="0">
             <a:spAutoFit/>
           </a:bodyPr>
           <a:lstStyle/>
@@ -10798,7 +10567,7 @@
 </file>
 
 <file path=ppt/slides/slide21.xml><?xml version="1.0" encoding="utf-8"?>
-<p:sld xmlns:a="http://schemas.openxmlformats.org/drawingml/2006/main" xmlns:r="http://schemas.openxmlformats.org/officeDocument/2006/relationships" xmlns:p="http://schemas.openxmlformats.org/presentationml/2006/main">
+<p:sld xmlns:a="http://schemas.openxmlformats.org/drawingml/2006/main" xmlns:p="http://schemas.openxmlformats.org/presentationml/2006/main" xmlns:r="http://schemas.openxmlformats.org/officeDocument/2006/relationships">
   <p:cSld>
     <p:spTree>
       <p:nvGrpSpPr>
@@ -10806,14 +10575,7 @@
         <p:cNvGrpSpPr/>
         <p:nvPr/>
       </p:nvGrpSpPr>
-      <p:grpSpPr>
-        <a:xfrm>
-          <a:off x="0" y="0"/>
-          <a:ext cx="0" cy="0"/>
-          <a:chOff x="0" y="0"/>
-          <a:chExt cx="0" cy="0"/>
-        </a:xfrm>
-      </p:grpSpPr>
+      <p:grpSpPr/>
       <p:sp>
         <p:nvSpPr>
           <p:cNvPr id="2" name="Rectangle 1"/>
@@ -10854,7 +10616,6 @@
           <a:lstStyle/>
           <a:p>
             <a:pPr algn="ctr"/>
-            <a:endParaRPr/>
           </a:p>
         </p:txBody>
       </p:sp>
@@ -10875,7 +10636,7 @@
           <a:noFill/>
         </p:spPr>
         <p:txBody>
-          <a:bodyPr wrap="square" lIns="0" tIns="0" rIns="0" bIns="0">
+          <a:bodyPr wrap="square" lIns="0" tIns="0" bIns="0" rIns="0">
             <a:spAutoFit/>
           </a:bodyPr>
           <a:lstStyle/>
@@ -10911,7 +10672,7 @@
           <a:noFill/>
         </p:spPr>
         <p:txBody>
-          <a:bodyPr wrap="square" lIns="0" tIns="0" rIns="0" bIns="0">
+          <a:bodyPr wrap="square" lIns="0" tIns="0" bIns="0" rIns="0">
             <a:spAutoFit/>
           </a:bodyPr>
           <a:lstStyle/>
@@ -10998,7 +10759,7 @@
           <a:noFill/>
         </p:spPr>
         <p:txBody>
-          <a:bodyPr wrap="square" lIns="0" tIns="0" rIns="0" bIns="0">
+          <a:bodyPr wrap="square" lIns="0" tIns="0" bIns="0" rIns="0">
             <a:spAutoFit/>
           </a:bodyPr>
           <a:lstStyle/>
@@ -11093,7 +10854,7 @@
 </file>
 
 <file path=ppt/slides/slide22.xml><?xml version="1.0" encoding="utf-8"?>
-<p:sld xmlns:a="http://schemas.openxmlformats.org/drawingml/2006/main" xmlns:r="http://schemas.openxmlformats.org/officeDocument/2006/relationships" xmlns:p="http://schemas.openxmlformats.org/presentationml/2006/main">
+<p:sld xmlns:a="http://schemas.openxmlformats.org/drawingml/2006/main" xmlns:p="http://schemas.openxmlformats.org/presentationml/2006/main" xmlns:r="http://schemas.openxmlformats.org/officeDocument/2006/relationships">
   <p:cSld>
     <p:spTree>
       <p:nvGrpSpPr>
@@ -11101,14 +10862,7 @@
         <p:cNvGrpSpPr/>
         <p:nvPr/>
       </p:nvGrpSpPr>
-      <p:grpSpPr>
-        <a:xfrm>
-          <a:off x="0" y="0"/>
-          <a:ext cx="0" cy="0"/>
-          <a:chOff x="0" y="0"/>
-          <a:chExt cx="0" cy="0"/>
-        </a:xfrm>
-      </p:grpSpPr>
+      <p:grpSpPr/>
       <p:sp>
         <p:nvSpPr>
           <p:cNvPr id="2" name="Rectangle 1"/>
@@ -11149,7 +10903,6 @@
           <a:lstStyle/>
           <a:p>
             <a:pPr algn="ctr"/>
-            <a:endParaRPr/>
           </a:p>
         </p:txBody>
       </p:sp>
@@ -11170,7 +10923,7 @@
           <a:noFill/>
         </p:spPr>
         <p:txBody>
-          <a:bodyPr wrap="square" lIns="0" tIns="0" rIns="0" bIns="0">
+          <a:bodyPr wrap="square" lIns="0" tIns="0" bIns="0" rIns="0">
             <a:spAutoFit/>
           </a:bodyPr>
           <a:lstStyle/>
@@ -11214,7 +10967,7 @@
 </file>
 
 <file path=ppt/slides/slide3.xml><?xml version="1.0" encoding="utf-8"?>
-<p:sld xmlns:a="http://schemas.openxmlformats.org/drawingml/2006/main" xmlns:r="http://schemas.openxmlformats.org/officeDocument/2006/relationships" xmlns:p="http://schemas.openxmlformats.org/presentationml/2006/main">
+<p:sld xmlns:a="http://schemas.openxmlformats.org/drawingml/2006/main" xmlns:p="http://schemas.openxmlformats.org/presentationml/2006/main" xmlns:r="http://schemas.openxmlformats.org/officeDocument/2006/relationships">
   <p:cSld>
     <p:spTree>
       <p:nvGrpSpPr>
@@ -11222,14 +10975,7 @@
         <p:cNvGrpSpPr/>
         <p:nvPr/>
       </p:nvGrpSpPr>
-      <p:grpSpPr>
-        <a:xfrm>
-          <a:off x="0" y="0"/>
-          <a:ext cx="0" cy="0"/>
-          <a:chOff x="0" y="0"/>
-          <a:chExt cx="0" cy="0"/>
-        </a:xfrm>
-      </p:grpSpPr>
+      <p:grpSpPr/>
       <p:sp>
         <p:nvSpPr>
           <p:cNvPr id="2" name="Rectangle 1"/>
@@ -11270,7 +11016,6 @@
           <a:lstStyle/>
           <a:p>
             <a:pPr algn="ctr"/>
-            <a:endParaRPr/>
           </a:p>
         </p:txBody>
       </p:sp>
@@ -11291,7 +11036,7 @@
           <a:noFill/>
         </p:spPr>
         <p:txBody>
-          <a:bodyPr wrap="square" lIns="0" tIns="0" rIns="0" bIns="0">
+          <a:bodyPr wrap="square" lIns="0" tIns="0" bIns="0" rIns="0">
             <a:spAutoFit/>
           </a:bodyPr>
           <a:lstStyle/>
@@ -11327,7 +11072,7 @@
           <a:noFill/>
         </p:spPr>
         <p:txBody>
-          <a:bodyPr wrap="square" lIns="0" tIns="0" rIns="0" bIns="0">
+          <a:bodyPr wrap="square" lIns="0" tIns="0" bIns="0" rIns="0">
             <a:spAutoFit/>
           </a:bodyPr>
           <a:lstStyle/>
@@ -11487,7 +11232,7 @@
 </file>
 
 <file path=ppt/slides/slide4.xml><?xml version="1.0" encoding="utf-8"?>
-<p:sld xmlns:a="http://schemas.openxmlformats.org/drawingml/2006/main" xmlns:r="http://schemas.openxmlformats.org/officeDocument/2006/relationships" xmlns:p="http://schemas.openxmlformats.org/presentationml/2006/main">
+<p:sld xmlns:a="http://schemas.openxmlformats.org/drawingml/2006/main" xmlns:p="http://schemas.openxmlformats.org/presentationml/2006/main" xmlns:r="http://schemas.openxmlformats.org/officeDocument/2006/relationships">
   <p:cSld>
     <p:spTree>
       <p:nvGrpSpPr>
@@ -11495,14 +11240,7 @@
         <p:cNvGrpSpPr/>
         <p:nvPr/>
       </p:nvGrpSpPr>
-      <p:grpSpPr>
-        <a:xfrm>
-          <a:off x="0" y="0"/>
-          <a:ext cx="0" cy="0"/>
-          <a:chOff x="0" y="0"/>
-          <a:chExt cx="0" cy="0"/>
-        </a:xfrm>
-      </p:grpSpPr>
+      <p:grpSpPr/>
       <p:sp>
         <p:nvSpPr>
           <p:cNvPr id="2" name="Rectangle 1"/>
@@ -11543,7 +11281,6 @@
           <a:lstStyle/>
           <a:p>
             <a:pPr algn="ctr"/>
-            <a:endParaRPr/>
           </a:p>
         </p:txBody>
       </p:sp>
@@ -11564,7 +11301,7 @@
           <a:noFill/>
         </p:spPr>
         <p:txBody>
-          <a:bodyPr wrap="square" lIns="0" tIns="0" rIns="0" bIns="0">
+          <a:bodyPr wrap="square" lIns="0" tIns="0" bIns="0" rIns="0">
             <a:spAutoFit/>
           </a:bodyPr>
           <a:lstStyle/>
@@ -11602,39 +11339,15 @@
                 <a:tableStyleId>{5C22544A-7EE6-4342-B048-85BDC9FD1C3A}</a:tableStyleId>
               </a:tblPr>
               <a:tblGrid>
-                <a:gridCol w="1645920">
-                  <a:extLst>
-                    <a:ext uri="{9D8B030D-6E8A-4147-A177-3AD203B41FA5}">
-                      <a16:colId xmlns:a16="http://schemas.microsoft.com/office/drawing/2014/main" val="20000"/>
-                    </a:ext>
-                  </a:extLst>
-                </a:gridCol>
-                <a:gridCol w="2103120">
-                  <a:extLst>
-                    <a:ext uri="{9D8B030D-6E8A-4147-A177-3AD203B41FA5}">
-                      <a16:colId xmlns:a16="http://schemas.microsoft.com/office/drawing/2014/main" val="20001"/>
-                    </a:ext>
-                  </a:extLst>
-                </a:gridCol>
-                <a:gridCol w="3840480">
-                  <a:extLst>
-                    <a:ext uri="{9D8B030D-6E8A-4147-A177-3AD203B41FA5}">
-                      <a16:colId xmlns:a16="http://schemas.microsoft.com/office/drawing/2014/main" val="20002"/>
-                    </a:ext>
-                  </a:extLst>
-                </a:gridCol>
-                <a:gridCol w="3139135">
-                  <a:extLst>
-                    <a:ext uri="{9D8B030D-6E8A-4147-A177-3AD203B41FA5}">
-                      <a16:colId xmlns:a16="http://schemas.microsoft.com/office/drawing/2014/main" val="20003"/>
-                    </a:ext>
-                  </a:extLst>
-                </a:gridCol>
+                <a:gridCol w="1645920"/>
+                <a:gridCol w="2103120"/>
+                <a:gridCol w="3840480"/>
+                <a:gridCol w="3139135"/>
               </a:tblGrid>
               <a:tr h="640080">
                 <a:tc>
                   <a:txBody>
-                    <a:bodyPr/>
+                    <a:bodyPr lIns="73152" rIns="73152" tIns="73152" bIns="73152" wrap="square"/>
                     <a:lstStyle/>
                     <a:p>
                       <a:pPr algn="l">
@@ -11658,7 +11371,7 @@
                 </a:tc>
                 <a:tc>
                   <a:txBody>
-                    <a:bodyPr/>
+                    <a:bodyPr lIns="73152" rIns="73152" tIns="73152" bIns="73152" wrap="square"/>
                     <a:lstStyle/>
                     <a:p>
                       <a:pPr algn="l">
@@ -11682,7 +11395,7 @@
                 </a:tc>
                 <a:tc>
                   <a:txBody>
-                    <a:bodyPr/>
+                    <a:bodyPr lIns="73152" rIns="73152" tIns="73152" bIns="73152" wrap="square"/>
                     <a:lstStyle/>
                     <a:p>
                       <a:pPr algn="l">
@@ -11706,7 +11419,7 @@
                 </a:tc>
                 <a:tc>
                   <a:txBody>
-                    <a:bodyPr/>
+                    <a:bodyPr lIns="73152" rIns="73152" tIns="73152" bIns="73152" wrap="square"/>
                     <a:lstStyle/>
                     <a:p>
                       <a:pPr algn="l">
@@ -11728,16 +11441,11 @@
                     </a:solidFill>
                   </a:tcPr>
                 </a:tc>
-                <a:extLst>
-                  <a:ext uri="{0D108BD9-81ED-4DB2-BD59-A6C34878D82A}">
-                    <a16:rowId xmlns:a16="http://schemas.microsoft.com/office/drawing/2014/main" val="10000"/>
-                  </a:ext>
-                </a:extLst>
               </a:tr>
               <a:tr h="640080">
                 <a:tc>
                   <a:txBody>
-                    <a:bodyPr/>
+                    <a:bodyPr lIns="73152" rIns="73152" tIns="73152" bIns="73152" wrap="square"/>
                     <a:lstStyle/>
                     <a:p>
                       <a:pPr algn="l">
@@ -11761,7 +11469,7 @@
                 </a:tc>
                 <a:tc>
                   <a:txBody>
-                    <a:bodyPr/>
+                    <a:bodyPr lIns="73152" rIns="73152" tIns="73152" bIns="73152" wrap="square"/>
                     <a:lstStyle/>
                     <a:p>
                       <a:pPr algn="l">
@@ -11785,7 +11493,7 @@
                 </a:tc>
                 <a:tc>
                   <a:txBody>
-                    <a:bodyPr/>
+                    <a:bodyPr lIns="73152" rIns="73152" tIns="73152" bIns="73152" wrap="square"/>
                     <a:lstStyle/>
                     <a:p>
                       <a:pPr algn="l">
@@ -11809,7 +11517,7 @@
                 </a:tc>
                 <a:tc>
                   <a:txBody>
-                    <a:bodyPr/>
+                    <a:bodyPr lIns="73152" rIns="73152" tIns="73152" bIns="73152" wrap="square"/>
                     <a:lstStyle/>
                     <a:p>
                       <a:pPr algn="l">
@@ -11831,16 +11539,11 @@
                     </a:solidFill>
                   </a:tcPr>
                 </a:tc>
-                <a:extLst>
-                  <a:ext uri="{0D108BD9-81ED-4DB2-BD59-A6C34878D82A}">
-                    <a16:rowId xmlns:a16="http://schemas.microsoft.com/office/drawing/2014/main" val="10001"/>
-                  </a:ext>
-                </a:extLst>
               </a:tr>
               <a:tr h="640080">
                 <a:tc>
                   <a:txBody>
-                    <a:bodyPr/>
+                    <a:bodyPr lIns="73152" rIns="73152" tIns="73152" bIns="73152" wrap="square"/>
                     <a:lstStyle/>
                     <a:p>
                       <a:pPr algn="l">
@@ -11864,7 +11567,7 @@
                 </a:tc>
                 <a:tc>
                   <a:txBody>
-                    <a:bodyPr/>
+                    <a:bodyPr lIns="73152" rIns="73152" tIns="73152" bIns="73152" wrap="square"/>
                     <a:lstStyle/>
                     <a:p>
                       <a:pPr algn="l">
@@ -11888,7 +11591,7 @@
                 </a:tc>
                 <a:tc>
                   <a:txBody>
-                    <a:bodyPr/>
+                    <a:bodyPr lIns="73152" rIns="73152" tIns="73152" bIns="73152" wrap="square"/>
                     <a:lstStyle/>
                     <a:p>
                       <a:pPr algn="l">
@@ -11912,7 +11615,7 @@
                 </a:tc>
                 <a:tc>
                   <a:txBody>
-                    <a:bodyPr/>
+                    <a:bodyPr lIns="73152" rIns="73152" tIns="73152" bIns="73152" wrap="square"/>
                     <a:lstStyle/>
                     <a:p>
                       <a:pPr algn="l">
@@ -11934,16 +11637,11 @@
                     </a:solidFill>
                   </a:tcPr>
                 </a:tc>
-                <a:extLst>
-                  <a:ext uri="{0D108BD9-81ED-4DB2-BD59-A6C34878D82A}">
-                    <a16:rowId xmlns:a16="http://schemas.microsoft.com/office/drawing/2014/main" val="10002"/>
-                  </a:ext>
-                </a:extLst>
               </a:tr>
               <a:tr h="640080">
                 <a:tc>
                   <a:txBody>
-                    <a:bodyPr/>
+                    <a:bodyPr lIns="73152" rIns="73152" tIns="73152" bIns="73152" wrap="square"/>
                     <a:lstStyle/>
                     <a:p>
                       <a:pPr algn="l">
@@ -11967,7 +11665,7 @@
                 </a:tc>
                 <a:tc>
                   <a:txBody>
-                    <a:bodyPr/>
+                    <a:bodyPr lIns="73152" rIns="73152" tIns="73152" bIns="73152" wrap="square"/>
                     <a:lstStyle/>
                     <a:p>
                       <a:pPr algn="l">
@@ -11991,7 +11689,7 @@
                 </a:tc>
                 <a:tc>
                   <a:txBody>
-                    <a:bodyPr/>
+                    <a:bodyPr lIns="73152" rIns="73152" tIns="73152" bIns="73152" wrap="square"/>
                     <a:lstStyle/>
                     <a:p>
                       <a:pPr algn="l">
@@ -12015,7 +11713,7 @@
                 </a:tc>
                 <a:tc>
                   <a:txBody>
-                    <a:bodyPr/>
+                    <a:bodyPr lIns="73152" rIns="73152" tIns="73152" bIns="73152" wrap="square"/>
                     <a:lstStyle/>
                     <a:p>
                       <a:pPr algn="l">
@@ -12037,16 +11735,11 @@
                     </a:solidFill>
                   </a:tcPr>
                 </a:tc>
-                <a:extLst>
-                  <a:ext uri="{0D108BD9-81ED-4DB2-BD59-A6C34878D82A}">
-                    <a16:rowId xmlns:a16="http://schemas.microsoft.com/office/drawing/2014/main" val="10003"/>
-                  </a:ext>
-                </a:extLst>
               </a:tr>
               <a:tr h="640080">
                 <a:tc>
                   <a:txBody>
-                    <a:bodyPr/>
+                    <a:bodyPr lIns="73152" rIns="73152" tIns="73152" bIns="73152" wrap="square"/>
                     <a:lstStyle/>
                     <a:p>
                       <a:pPr algn="l">
@@ -12070,7 +11763,7 @@
                 </a:tc>
                 <a:tc>
                   <a:txBody>
-                    <a:bodyPr/>
+                    <a:bodyPr lIns="73152" rIns="73152" tIns="73152" bIns="73152" wrap="square"/>
                     <a:lstStyle/>
                     <a:p>
                       <a:pPr algn="l">
@@ -12094,7 +11787,7 @@
                 </a:tc>
                 <a:tc>
                   <a:txBody>
-                    <a:bodyPr/>
+                    <a:bodyPr lIns="73152" rIns="73152" tIns="73152" bIns="73152" wrap="square"/>
                     <a:lstStyle/>
                     <a:p>
                       <a:pPr algn="l">
@@ -12118,7 +11811,7 @@
                 </a:tc>
                 <a:tc>
                   <a:txBody>
-                    <a:bodyPr/>
+                    <a:bodyPr lIns="73152" rIns="73152" tIns="73152" bIns="73152" wrap="square"/>
                     <a:lstStyle/>
                     <a:p>
                       <a:pPr algn="l">
@@ -12140,16 +11833,11 @@
                     </a:solidFill>
                   </a:tcPr>
                 </a:tc>
-                <a:extLst>
-                  <a:ext uri="{0D108BD9-81ED-4DB2-BD59-A6C34878D82A}">
-                    <a16:rowId xmlns:a16="http://schemas.microsoft.com/office/drawing/2014/main" val="10004"/>
-                  </a:ext>
-                </a:extLst>
               </a:tr>
               <a:tr h="640080">
                 <a:tc>
                   <a:txBody>
-                    <a:bodyPr/>
+                    <a:bodyPr lIns="73152" rIns="73152" tIns="73152" bIns="73152" wrap="square"/>
                     <a:lstStyle/>
                     <a:p>
                       <a:pPr algn="l">
@@ -12173,7 +11861,7 @@
                 </a:tc>
                 <a:tc>
                   <a:txBody>
-                    <a:bodyPr/>
+                    <a:bodyPr lIns="73152" rIns="73152" tIns="73152" bIns="73152" wrap="square"/>
                     <a:lstStyle/>
                     <a:p>
                       <a:pPr algn="l">
@@ -12197,7 +11885,7 @@
                 </a:tc>
                 <a:tc>
                   <a:txBody>
-                    <a:bodyPr/>
+                    <a:bodyPr lIns="73152" rIns="73152" tIns="73152" bIns="73152" wrap="square"/>
                     <a:lstStyle/>
                     <a:p>
                       <a:pPr algn="l">
@@ -12221,7 +11909,7 @@
                 </a:tc>
                 <a:tc>
                   <a:txBody>
-                    <a:bodyPr/>
+                    <a:bodyPr lIns="73152" rIns="73152" tIns="73152" bIns="73152" wrap="square"/>
                     <a:lstStyle/>
                     <a:p>
                       <a:pPr algn="l">
@@ -12243,11 +11931,6 @@
                     </a:solidFill>
                   </a:tcPr>
                 </a:tc>
-                <a:extLst>
-                  <a:ext uri="{0D108BD9-81ED-4DB2-BD59-A6C34878D82A}">
-                    <a16:rowId xmlns:a16="http://schemas.microsoft.com/office/drawing/2014/main" val="10005"/>
-                  </a:ext>
-                </a:extLst>
               </a:tr>
             </a:tbl>
           </a:graphicData>
@@ -12270,13 +11953,13 @@
           <a:noFill/>
         </p:spPr>
         <p:txBody>
-          <a:bodyPr wrap="square" lIns="0" tIns="0" rIns="0" bIns="0">
+          <a:bodyPr wrap="square" lIns="0" tIns="0" bIns="0" rIns="0">
             <a:spAutoFit/>
           </a:bodyPr>
           <a:lstStyle/>
           <a:p>
             <a:r>
-              <a:rPr sz="1200" b="1">
+              <a:rPr b="1" sz="1200">
                 <a:solidFill>
                   <a:srgbClr val="0F2D59"/>
                 </a:solidFill>
@@ -12303,7 +11986,7 @@
 </file>
 
 <file path=ppt/slides/slide5.xml><?xml version="1.0" encoding="utf-8"?>
-<p:sld xmlns:a="http://schemas.openxmlformats.org/drawingml/2006/main" xmlns:r="http://schemas.openxmlformats.org/officeDocument/2006/relationships" xmlns:p="http://schemas.openxmlformats.org/presentationml/2006/main">
+<p:sld xmlns:a="http://schemas.openxmlformats.org/drawingml/2006/main" xmlns:p="http://schemas.openxmlformats.org/presentationml/2006/main" xmlns:r="http://schemas.openxmlformats.org/officeDocument/2006/relationships">
   <p:cSld>
     <p:spTree>
       <p:nvGrpSpPr>
@@ -12311,14 +11994,7 @@
         <p:cNvGrpSpPr/>
         <p:nvPr/>
       </p:nvGrpSpPr>
-      <p:grpSpPr>
-        <a:xfrm>
-          <a:off x="0" y="0"/>
-          <a:ext cx="0" cy="0"/>
-          <a:chOff x="0" y="0"/>
-          <a:chExt cx="0" cy="0"/>
-        </a:xfrm>
-      </p:grpSpPr>
+      <p:grpSpPr/>
       <p:sp>
         <p:nvSpPr>
           <p:cNvPr id="2" name="Rectangle 1"/>
@@ -12359,7 +12035,6 @@
           <a:lstStyle/>
           <a:p>
             <a:pPr algn="ctr"/>
-            <a:endParaRPr/>
           </a:p>
         </p:txBody>
       </p:sp>
@@ -12380,7 +12055,7 @@
           <a:noFill/>
         </p:spPr>
         <p:txBody>
-          <a:bodyPr wrap="square" lIns="0" tIns="0" rIns="0" bIns="0">
+          <a:bodyPr wrap="square" lIns="0" tIns="0" bIns="0" rIns="0">
             <a:spAutoFit/>
           </a:bodyPr>
           <a:lstStyle/>
@@ -12416,7 +12091,7 @@
           <a:noFill/>
         </p:spPr>
         <p:txBody>
-          <a:bodyPr wrap="square" lIns="0" tIns="0" rIns="0" bIns="0">
+          <a:bodyPr wrap="square" lIns="0" tIns="0" bIns="0" rIns="0">
             <a:spAutoFit/>
           </a:bodyPr>
           <a:lstStyle/>
@@ -12547,7 +12222,7 @@
 </file>
 
 <file path=ppt/slides/slide6.xml><?xml version="1.0" encoding="utf-8"?>
-<p:sld xmlns:a="http://schemas.openxmlformats.org/drawingml/2006/main" xmlns:r="http://schemas.openxmlformats.org/officeDocument/2006/relationships" xmlns:p="http://schemas.openxmlformats.org/presentationml/2006/main">
+<p:sld xmlns:a="http://schemas.openxmlformats.org/drawingml/2006/main" xmlns:p="http://schemas.openxmlformats.org/presentationml/2006/main" xmlns:r="http://schemas.openxmlformats.org/officeDocument/2006/relationships">
   <p:cSld>
     <p:spTree>
       <p:nvGrpSpPr>
@@ -12555,14 +12230,7 @@
         <p:cNvGrpSpPr/>
         <p:nvPr/>
       </p:nvGrpSpPr>
-      <p:grpSpPr>
-        <a:xfrm>
-          <a:off x="0" y="0"/>
-          <a:ext cx="0" cy="0"/>
-          <a:chOff x="0" y="0"/>
-          <a:chExt cx="0" cy="0"/>
-        </a:xfrm>
-      </p:grpSpPr>
+      <p:grpSpPr/>
       <p:sp>
         <p:nvSpPr>
           <p:cNvPr id="2" name="Rectangle 1"/>
@@ -12603,7 +12271,6 @@
           <a:lstStyle/>
           <a:p>
             <a:pPr algn="ctr"/>
-            <a:endParaRPr/>
           </a:p>
         </p:txBody>
       </p:sp>
@@ -12624,7 +12291,7 @@
           <a:noFill/>
         </p:spPr>
         <p:txBody>
-          <a:bodyPr wrap="square" lIns="0" tIns="0" rIns="0" bIns="0">
+          <a:bodyPr wrap="square" lIns="0" tIns="0" bIns="0" rIns="0">
             <a:spAutoFit/>
           </a:bodyPr>
           <a:lstStyle/>
@@ -12681,12 +12348,12 @@
           </a:fontRef>
         </p:style>
         <p:txBody>
-          <a:bodyPr wrap="square" lIns="137160" tIns="137160" rIns="137160" bIns="137160" rtlCol="0" anchor="ctr"/>
+          <a:bodyPr rtlCol="0" anchor="ctr" wrap="square" lIns="137160" rIns="137160" tIns="137160" bIns="137160"/>
           <a:lstStyle/>
           <a:p>
             <a:pPr algn="ctr"/>
             <a:r>
-              <a:rPr sz="1500" b="1">
+              <a:rPr b="1" sz="1500">
                 <a:solidFill>
                   <a:srgbClr val="0F2D59"/>
                 </a:solidFill>
@@ -12721,7 +12388,7 @@
           <a:noFill/>
         </p:spPr>
         <p:txBody>
-          <a:bodyPr wrap="square" lIns="0" tIns="0" rIns="0" bIns="0">
+          <a:bodyPr wrap="square" lIns="0" tIns="0" bIns="0" rIns="0">
             <a:spAutoFit/>
           </a:bodyPr>
           <a:lstStyle/>
@@ -12852,7 +12519,7 @@
 </file>
 
 <file path=ppt/slides/slide7.xml><?xml version="1.0" encoding="utf-8"?>
-<p:sld xmlns:a="http://schemas.openxmlformats.org/drawingml/2006/main" xmlns:r="http://schemas.openxmlformats.org/officeDocument/2006/relationships" xmlns:p="http://schemas.openxmlformats.org/presentationml/2006/main">
+<p:sld xmlns:a="http://schemas.openxmlformats.org/drawingml/2006/main" xmlns:p="http://schemas.openxmlformats.org/presentationml/2006/main" xmlns:r="http://schemas.openxmlformats.org/officeDocument/2006/relationships">
   <p:cSld>
     <p:spTree>
       <p:nvGrpSpPr>
@@ -12860,14 +12527,7 @@
         <p:cNvGrpSpPr/>
         <p:nvPr/>
       </p:nvGrpSpPr>
-      <p:grpSpPr>
-        <a:xfrm>
-          <a:off x="0" y="0"/>
-          <a:ext cx="0" cy="0"/>
-          <a:chOff x="0" y="0"/>
-          <a:chExt cx="0" cy="0"/>
-        </a:xfrm>
-      </p:grpSpPr>
+      <p:grpSpPr/>
       <p:sp>
         <p:nvSpPr>
           <p:cNvPr id="2" name="Rectangle 1"/>
@@ -12908,7 +12568,6 @@
           <a:lstStyle/>
           <a:p>
             <a:pPr algn="ctr"/>
-            <a:endParaRPr/>
           </a:p>
         </p:txBody>
       </p:sp>
@@ -12929,7 +12588,7 @@
           <a:noFill/>
         </p:spPr>
         <p:txBody>
-          <a:bodyPr wrap="square" lIns="0" tIns="0" rIns="0" bIns="0">
+          <a:bodyPr wrap="square" lIns="0" tIns="0" bIns="0" rIns="0">
             <a:spAutoFit/>
           </a:bodyPr>
           <a:lstStyle/>
@@ -12965,7 +12624,7 @@
           <a:noFill/>
         </p:spPr>
         <p:txBody>
-          <a:bodyPr wrap="square" lIns="0" tIns="0" rIns="0" bIns="0">
+          <a:bodyPr wrap="square" lIns="0" tIns="0" bIns="0" rIns="0">
             <a:spAutoFit/>
           </a:bodyPr>
           <a:lstStyle/>
@@ -13096,7 +12755,7 @@
 </file>
 
 <file path=ppt/slides/slide8.xml><?xml version="1.0" encoding="utf-8"?>
-<p:sld xmlns:a="http://schemas.openxmlformats.org/drawingml/2006/main" xmlns:r="http://schemas.openxmlformats.org/officeDocument/2006/relationships" xmlns:p="http://schemas.openxmlformats.org/presentationml/2006/main">
+<p:sld xmlns:a="http://schemas.openxmlformats.org/drawingml/2006/main" xmlns:p="http://schemas.openxmlformats.org/presentationml/2006/main" xmlns:r="http://schemas.openxmlformats.org/officeDocument/2006/relationships">
   <p:cSld>
     <p:spTree>
       <p:nvGrpSpPr>
@@ -13104,14 +12763,7 @@
         <p:cNvGrpSpPr/>
         <p:nvPr/>
       </p:nvGrpSpPr>
-      <p:grpSpPr>
-        <a:xfrm>
-          <a:off x="0" y="0"/>
-          <a:ext cx="0" cy="0"/>
-          <a:chOff x="0" y="0"/>
-          <a:chExt cx="0" cy="0"/>
-        </a:xfrm>
-      </p:grpSpPr>
+      <p:grpSpPr/>
       <p:sp>
         <p:nvSpPr>
           <p:cNvPr id="2" name="Rectangle 1"/>
@@ -13152,7 +12804,6 @@
           <a:lstStyle/>
           <a:p>
             <a:pPr algn="ctr"/>
-            <a:endParaRPr/>
           </a:p>
         </p:txBody>
       </p:sp>
@@ -13173,7 +12824,7 @@
           <a:noFill/>
         </p:spPr>
         <p:txBody>
-          <a:bodyPr wrap="square" lIns="0" tIns="0" rIns="0" bIns="0">
+          <a:bodyPr wrap="square" lIns="0" tIns="0" bIns="0" rIns="0">
             <a:spAutoFit/>
           </a:bodyPr>
           <a:lstStyle/>
@@ -13209,13 +12860,13 @@
           <a:noFill/>
         </p:spPr>
         <p:txBody>
-          <a:bodyPr wrap="square" lIns="0" tIns="0" rIns="0" bIns="0">
+          <a:bodyPr wrap="square" lIns="0" tIns="0" bIns="0" rIns="0">
             <a:spAutoFit/>
           </a:bodyPr>
           <a:lstStyle/>
           <a:p>
             <a:r>
-              <a:rPr sz="1600" b="1">
+              <a:rPr b="1" sz="1600">
                 <a:solidFill>
                   <a:srgbClr val="0F2D59"/>
                 </a:solidFill>
@@ -13250,7 +12901,7 @@
           <a:noFill/>
         </p:spPr>
         <p:txBody>
-          <a:bodyPr wrap="square" lIns="0" tIns="0" rIns="0" bIns="0">
+          <a:bodyPr wrap="square" lIns="0" tIns="0" bIns="0" rIns="0">
             <a:spAutoFit/>
           </a:bodyPr>
           <a:lstStyle/>
@@ -13439,7 +13090,7 @@
 </file>
 
 <file path=ppt/slides/slide9.xml><?xml version="1.0" encoding="utf-8"?>
-<p:sld xmlns:a="http://schemas.openxmlformats.org/drawingml/2006/main" xmlns:r="http://schemas.openxmlformats.org/officeDocument/2006/relationships" xmlns:p="http://schemas.openxmlformats.org/presentationml/2006/main">
+<p:sld xmlns:a="http://schemas.openxmlformats.org/drawingml/2006/main" xmlns:p="http://schemas.openxmlformats.org/presentationml/2006/main" xmlns:r="http://schemas.openxmlformats.org/officeDocument/2006/relationships">
   <p:cSld>
     <p:spTree>
       <p:nvGrpSpPr>
@@ -13447,14 +13098,7 @@
         <p:cNvGrpSpPr/>
         <p:nvPr/>
       </p:nvGrpSpPr>
-      <p:grpSpPr>
-        <a:xfrm>
-          <a:off x="0" y="0"/>
-          <a:ext cx="0" cy="0"/>
-          <a:chOff x="0" y="0"/>
-          <a:chExt cx="0" cy="0"/>
-        </a:xfrm>
-      </p:grpSpPr>
+      <p:grpSpPr/>
       <p:sp>
         <p:nvSpPr>
           <p:cNvPr id="2" name="Rectangle 1"/>
@@ -13495,7 +13139,6 @@
           <a:lstStyle/>
           <a:p>
             <a:pPr algn="ctr"/>
-            <a:endParaRPr/>
           </a:p>
         </p:txBody>
       </p:sp>
@@ -13516,7 +13159,7 @@
           <a:noFill/>
         </p:spPr>
         <p:txBody>
-          <a:bodyPr wrap="square" lIns="0" tIns="0" rIns="0" bIns="0">
+          <a:bodyPr wrap="square" lIns="0" tIns="0" bIns="0" rIns="0">
             <a:spAutoFit/>
           </a:bodyPr>
           <a:lstStyle/>
@@ -13573,7 +13216,7 @@
           </a:fontRef>
         </p:style>
         <p:txBody>
-          <a:bodyPr wrap="square" lIns="45720" rIns="45720" rtlCol="0" anchor="ctr"/>
+          <a:bodyPr rtlCol="0" anchor="ctr" wrap="square" lIns="45720" rIns="45720"/>
           <a:lstStyle/>
           <a:p>
             <a:pPr algn="ctr">
@@ -13630,7 +13273,6 @@
           <a:lstStyle/>
           <a:p>
             <a:pPr algn="ctr"/>
-            <a:endParaRPr/>
           </a:p>
         </p:txBody>
       </p:sp>
@@ -13672,7 +13314,7 @@
           </a:fontRef>
         </p:style>
         <p:txBody>
-          <a:bodyPr wrap="square" lIns="45720" rIns="45720" rtlCol="0" anchor="ctr"/>
+          <a:bodyPr rtlCol="0" anchor="ctr" wrap="square" lIns="45720" rIns="45720"/>
           <a:lstStyle/>
           <a:p>
             <a:pPr algn="ctr">
@@ -13729,7 +13371,6 @@
           <a:lstStyle/>
           <a:p>
             <a:pPr algn="ctr"/>
-            <a:endParaRPr/>
           </a:p>
         </p:txBody>
       </p:sp>
@@ -13771,7 +13412,7 @@
           </a:fontRef>
         </p:style>
         <p:txBody>
-          <a:bodyPr wrap="square" lIns="45720" rIns="45720" rtlCol="0" anchor="ctr"/>
+          <a:bodyPr rtlCol="0" anchor="ctr" wrap="square" lIns="45720" rIns="45720"/>
           <a:lstStyle/>
           <a:p>
             <a:pPr algn="ctr">
@@ -13828,7 +13469,6 @@
           <a:lstStyle/>
           <a:p>
             <a:pPr algn="ctr"/>
-            <a:endParaRPr/>
           </a:p>
         </p:txBody>
       </p:sp>
@@ -13870,7 +13510,7 @@
           </a:fontRef>
         </p:style>
         <p:txBody>
-          <a:bodyPr wrap="square" lIns="45720" rIns="45720" rtlCol="0" anchor="ctr"/>
+          <a:bodyPr rtlCol="0" anchor="ctr" wrap="square" lIns="45720" rIns="45720"/>
           <a:lstStyle/>
           <a:p>
             <a:pPr algn="ctr">
@@ -13927,7 +13567,6 @@
           <a:lstStyle/>
           <a:p>
             <a:pPr algn="ctr"/>
-            <a:endParaRPr/>
           </a:p>
         </p:txBody>
       </p:sp>
@@ -13969,7 +13608,7 @@
           </a:fontRef>
         </p:style>
         <p:txBody>
-          <a:bodyPr wrap="square" lIns="45720" rIns="45720" rtlCol="0" anchor="ctr"/>
+          <a:bodyPr rtlCol="0" anchor="ctr" wrap="square" lIns="45720" rIns="45720"/>
           <a:lstStyle/>
           <a:p>
             <a:pPr algn="ctr">
@@ -14026,7 +13665,6 @@
           <a:lstStyle/>
           <a:p>
             <a:pPr algn="ctr"/>
-            <a:endParaRPr/>
           </a:p>
         </p:txBody>
       </p:sp>
@@ -14068,7 +13706,7 @@
           </a:fontRef>
         </p:style>
         <p:txBody>
-          <a:bodyPr wrap="square" lIns="45720" rIns="45720" rtlCol="0" anchor="ctr"/>
+          <a:bodyPr rtlCol="0" anchor="ctr" wrap="square" lIns="45720" rIns="45720"/>
           <a:lstStyle/>
           <a:p>
             <a:pPr algn="ctr">
@@ -14102,7 +13740,7 @@
           <a:noFill/>
         </p:spPr>
         <p:txBody>
-          <a:bodyPr wrap="square" lIns="0" tIns="0" rIns="0" bIns="0">
+          <a:bodyPr wrap="square" lIns="0" tIns="0" bIns="0" rIns="0">
             <a:spAutoFit/>
           </a:bodyPr>
           <a:lstStyle/>
